--- a/public/slides/aa174a/lecture_6.pptx
+++ b/public/slides/aa174a/lecture_6.pptx
@@ -161,9 +161,37 @@
 <file path=ppt/revisionInfo.xml><?xml version="1.0" encoding="utf-8"?>
 <p1510:revInfo xmlns:a="http://schemas.openxmlformats.org/drawingml/2006/main" xmlns:r="http://schemas.openxmlformats.org/officeDocument/2006/relationships" xmlns:p1510="http://schemas.microsoft.com/office/powerpoint/2015/10/main">
   <p1510:revLst>
-    <p1510:client id="{30CEA5F2-5E06-AC44-A185-BE6FFCB39194}" v="45" dt="2025-10-08T22:08:28.732"/>
+    <p1510:client id="{3FC4229E-5A4A-DA42-8710-BCDDAF105528}" v="1" dt="2026-08-13T22:47:53.772"/>
   </p1510:revLst>
 </p1510:revInfo>
+</file>
+
+<file path=ppt/changesInfos/changesInfo1.xml><?xml version="1.0" encoding="utf-8"?>
+<pc:chgInfo xmlns:a="http://schemas.openxmlformats.org/drawingml/2006/main" xmlns:r="http://schemas.openxmlformats.org/officeDocument/2006/relationships" xmlns:ac="http://schemas.microsoft.com/office/drawing/2013/main/command" xmlns:pc="http://schemas.microsoft.com/office/powerpoint/2013/main/command">
+  <pc:docChgLst>
+    <pc:chgData name="Daniele Gammelli" userId="292b8a31-f1ba-4b4c-b196-a231dc095d13" providerId="ADAL" clId="{6E670754-AB6A-5789-AA0A-6F6FD9CE3EEA}"/>
+    <pc:docChg chg="modSld">
+      <pc:chgData name="Daniele Gammelli" userId="292b8a31-f1ba-4b4c-b196-a231dc095d13" providerId="ADAL" clId="{6E670754-AB6A-5789-AA0A-6F6FD9CE3EEA}" dt="2026-08-13T22:47:57.684" v="1" actId="20577"/>
+      <pc:docMkLst>
+        <pc:docMk/>
+      </pc:docMkLst>
+      <pc:sldChg chg="modNotesTx">
+        <pc:chgData name="Daniele Gammelli" userId="292b8a31-f1ba-4b4c-b196-a231dc095d13" providerId="ADAL" clId="{6E670754-AB6A-5789-AA0A-6F6FD9CE3EEA}" dt="2026-08-13T22:47:57.684" v="1" actId="20577"/>
+        <pc:sldMkLst>
+          <pc:docMk/>
+          <pc:sldMk cId="3334838106" sldId="316"/>
+        </pc:sldMkLst>
+      </pc:sldChg>
+      <pc:sldChg chg="modNotesTx">
+        <pc:chgData name="Daniele Gammelli" userId="292b8a31-f1ba-4b4c-b196-a231dc095d13" providerId="ADAL" clId="{6E670754-AB6A-5789-AA0A-6F6FD9CE3EEA}" dt="2026-08-13T22:47:50.187" v="0" actId="20577"/>
+        <pc:sldMkLst>
+          <pc:docMk/>
+          <pc:sldMk cId="1515654389" sldId="327"/>
+        </pc:sldMkLst>
+      </pc:sldChg>
+    </pc:docChg>
+  </pc:docChgLst>
+</pc:chgInfo>
 </file>
 
 <file path=ppt/notesMasters/notesMaster1.xml><?xml version="1.0" encoding="utf-8"?>
@@ -248,7 +276,7 @@
           <a:p>
             <a:fld id="{EBD6F028-2067-3740-AA48-A91E93570B1D}" type="datetimeFigureOut">
               <a:rPr lang="en-US" smtClean="0"/>
-              <a:t>12/20/2025</a:t>
+              <a:t>8/13/26</a:t>
             </a:fld>
             <a:endParaRPr lang="en-US"/>
           </a:p>
@@ -735,63 +763,6 @@
               <a:buFont typeface="Arial" panose="020B0604020202020204" pitchFamily="34" charset="0"/>
               <a:buChar char="•"/>
             </a:pPr>
-            <a:r>
-              <a:rPr lang="en-US" dirty="0"/>
-              <a:t>Going back to the question on how to make a robot autonomous, a typical paradigm is represented by the see-think-act cycle</a:t>
-            </a:r>
-          </a:p>
-          <a:p>
-            <a:pPr marL="171450" indent="-171450">
-              <a:buFont typeface="Arial" panose="020B0604020202020204" pitchFamily="34" charset="0"/>
-              <a:buChar char="•"/>
-            </a:pPr>
-            <a:r>
-              <a:rPr lang="en-US" dirty="0"/>
-              <a:t>Where am I, what should I do, and do it</a:t>
-            </a:r>
-          </a:p>
-          <a:p>
-            <a:pPr marL="171450" indent="-171450">
-              <a:buFont typeface="Arial" panose="020B0604020202020204" pitchFamily="34" charset="0"/>
-              <a:buChar char="•"/>
-            </a:pPr>
-            <a:r>
-              <a:rPr lang="en-US" dirty="0"/>
-              <a:t>Four steps </a:t>
-            </a:r>
-          </a:p>
-          <a:p>
-            <a:pPr marL="171450" marR="0" lvl="0" indent="-171450" algn="l" defTabSz="914400" rtl="0" eaLnBrk="1" fontAlgn="auto" latinLnBrk="0" hangingPunct="1">
-              <a:lnSpc>
-                <a:spcPct val="100000"/>
-              </a:lnSpc>
-              <a:spcBef>
-                <a:spcPts val="0"/>
-              </a:spcBef>
-              <a:spcAft>
-                <a:spcPts val="0"/>
-              </a:spcAft>
-              <a:buClrTx/>
-              <a:buSzTx/>
-              <a:buFont typeface="Arial" panose="020B0604020202020204" pitchFamily="34" charset="0"/>
-              <a:buChar char="•"/>
-              <a:tabLst/>
-              <a:defRPr/>
-            </a:pPr>
-            <a:r>
-              <a:rPr lang="en-US" dirty="0"/>
-              <a:t>Division</a:t>
-            </a:r>
-            <a:r>
-              <a:rPr lang="en-US" baseline="0" dirty="0"/>
-              <a:t> is artificial, some steps could be blended</a:t>
-            </a:r>
-          </a:p>
-          <a:p>
-            <a:pPr marL="171450" indent="-171450">
-              <a:buFont typeface="Arial" panose="020B0604020202020204" pitchFamily="34" charset="0"/>
-              <a:buChar char="•"/>
-            </a:pPr>
             <a:endParaRPr lang="en-US" dirty="0"/>
           </a:p>
         </p:txBody>
@@ -877,189 +848,6 @@
             <p:txBody>
               <a:bodyPr/>
               <a:lstStyle/>
-              <a:p>
-                <a:pPr marL="171450" marR="0" lvl="0" indent="-171450" algn="l" defTabSz="914400" rtl="0" eaLnBrk="1" fontAlgn="auto" latinLnBrk="0" hangingPunct="1">
-                  <a:lnSpc>
-                    <a:spcPct val="100000"/>
-                  </a:lnSpc>
-                  <a:spcBef>
-                    <a:spcPts val="0"/>
-                  </a:spcBef>
-                  <a:spcAft>
-                    <a:spcPts val="0"/>
-                  </a:spcAft>
-                  <a:buClrTx/>
-                  <a:buSzTx/>
-                  <a:buFont typeface="Arial" panose="020B0604020202020204" pitchFamily="34" charset="0"/>
-                  <a:buChar char="•"/>
-                  <a:tabLst/>
-                  <a:defRPr/>
-                </a:pPr>
-                <a:r>
-                  <a:rPr lang="en-US" dirty="0"/>
-                  <a:t>Flat outputs are “magic coordinates” that make the system look like a chain of integrators.</a:t>
-                </a:r>
-                <a:r>
-                  <a:rPr lang="en-US" baseline="0" dirty="0"/>
-                  <a:t> </a:t>
-                </a:r>
-                <a:r>
-                  <a:rPr lang="en-US" dirty="0"/>
-                  <a:t>Once you express the system in terms of them, </a:t>
-                </a:r>
-                <a:r>
-                  <a:rPr lang="en-US" b="1" dirty="0"/>
-                  <a:t>trajectory planning and control</a:t>
-                </a:r>
-                <a:r>
-                  <a:rPr lang="en-US" dirty="0"/>
-                  <a:t> become much simpler — you can design trajectories for z</a:t>
-                </a:r>
-                <a14:m>
-                  <m:oMath xmlns:m="http://schemas.openxmlformats.org/officeDocument/2006/math">
-                    <m:d>
-                      <m:dPr>
-                        <m:ctrlPr>
-                          <a:rPr lang="ar-AE" sz="1200" i="1" kern="1200">
-                            <a:solidFill>
-                              <a:schemeClr val="tx1"/>
-                            </a:solidFill>
-                            <a:latin typeface="Cambria Math" panose="02040503050406030204" pitchFamily="18" charset="0"/>
-                            <a:ea typeface="+mn-ea"/>
-                            <a:cs typeface="+mn-cs"/>
-                          </a:rPr>
-                        </m:ctrlPr>
-                      </m:dPr>
-                      <m:e>
-                        <m:r>
-                          <a:rPr lang="ar-AE" sz="1200" i="1" kern="1200">
-                            <a:solidFill>
-                              <a:schemeClr val="tx1"/>
-                            </a:solidFill>
-                            <a:latin typeface="Cambria Math" panose="02040503050406030204" pitchFamily="18" charset="0"/>
-                            <a:ea typeface="+mn-ea"/>
-                            <a:cs typeface="+mn-cs"/>
-                          </a:rPr>
-                          <m:t>𝑡</m:t>
-                        </m:r>
-                      </m:e>
-                    </m:d>
-                  </m:oMath>
-                </a14:m>
-                <a:r>
-                  <a:rPr lang="ar-AE" dirty="0"/>
-                  <a:t>, </a:t>
-                </a:r>
-                <a:r>
-                  <a:rPr lang="en-US" dirty="0"/>
-                  <a:t>then algebraically recover all required states and inputs.</a:t>
-                </a:r>
-              </a:p>
-              <a:p>
-                <a:pPr marL="171450" marR="0" lvl="0" indent="-171450" algn="l" defTabSz="914400" rtl="0" eaLnBrk="1" fontAlgn="auto" latinLnBrk="0" hangingPunct="1">
-                  <a:lnSpc>
-                    <a:spcPct val="100000"/>
-                  </a:lnSpc>
-                  <a:spcBef>
-                    <a:spcPts val="0"/>
-                  </a:spcBef>
-                  <a:spcAft>
-                    <a:spcPts val="0"/>
-                  </a:spcAft>
-                  <a:buClrTx/>
-                  <a:buSzTx/>
-                  <a:buFont typeface="Arial" panose="020B0604020202020204" pitchFamily="34" charset="0"/>
-                  <a:buChar char="•"/>
-                  <a:tabLst/>
-                  <a:defRPr/>
-                </a:pPr>
-                <a:r>
-                  <a:rPr lang="en-US" dirty="0"/>
-                  <a:t>Effectively, in such magic coordinates, one simply has to control a system of type: z^(q+1) = w</a:t>
-                </a:r>
-              </a:p>
-              <a:p>
-                <a:pPr marL="171450" marR="0" lvl="0" indent="-171450" algn="l" defTabSz="914400" rtl="0" eaLnBrk="1" fontAlgn="auto" latinLnBrk="0" hangingPunct="1">
-                  <a:lnSpc>
-                    <a:spcPct val="100000"/>
-                  </a:lnSpc>
-                  <a:spcBef>
-                    <a:spcPts val="0"/>
-                  </a:spcBef>
-                  <a:spcAft>
-                    <a:spcPts val="0"/>
-                  </a:spcAft>
-                  <a:buClrTx/>
-                  <a:buSzTx/>
-                  <a:buFont typeface="Arial" panose="020B0604020202020204" pitchFamily="34" charset="0"/>
-                  <a:buChar char="•"/>
-                  <a:tabLst/>
-                  <a:defRPr/>
-                </a:pPr>
-                <a:r>
-                  <a:rPr lang="en-US" dirty="0"/>
-                  <a:t>This is extremely useful not only for </a:t>
-                </a:r>
-                <a:r>
-                  <a:rPr lang="en-US" dirty="0" err="1"/>
-                  <a:t>traj</a:t>
-                </a:r>
-                <a:r>
-                  <a:rPr lang="en-US" dirty="0"/>
-                  <a:t> planning, but also for </a:t>
-                </a:r>
-                <a:r>
-                  <a:rPr lang="en-US" dirty="0" err="1"/>
-                  <a:t>traj</a:t>
-                </a:r>
-                <a:r>
-                  <a:rPr lang="en-US" dirty="0"/>
-                  <a:t> tracking </a:t>
-                </a:r>
-              </a:p>
-              <a:p>
-                <a:pPr marL="171450" marR="0" lvl="0" indent="-171450" algn="l" defTabSz="914400" rtl="0" eaLnBrk="1" fontAlgn="auto" latinLnBrk="0" hangingPunct="1">
-                  <a:lnSpc>
-                    <a:spcPct val="100000"/>
-                  </a:lnSpc>
-                  <a:spcBef>
-                    <a:spcPts val="0"/>
-                  </a:spcBef>
-                  <a:spcAft>
-                    <a:spcPts val="0"/>
-                  </a:spcAft>
-                  <a:buClrTx/>
-                  <a:buSzTx/>
-                  <a:buFont typeface="Arial" panose="020B0604020202020204" pitchFamily="34" charset="0"/>
-                  <a:buChar char="•"/>
-                  <a:tabLst/>
-                  <a:defRPr/>
-                </a:pPr>
-                <a:r>
-                  <a:rPr lang="en-US" dirty="0"/>
-                  <a:t>As usual, we first fix ideas with one example</a:t>
-                </a:r>
-              </a:p>
-              <a:p>
-                <a:pPr marL="0" marR="0" lvl="0" indent="0" algn="l" defTabSz="914400" rtl="0" eaLnBrk="1" fontAlgn="auto" latinLnBrk="0" hangingPunct="1">
-                  <a:lnSpc>
-                    <a:spcPct val="100000"/>
-                  </a:lnSpc>
-                  <a:spcBef>
-                    <a:spcPts val="0"/>
-                  </a:spcBef>
-                  <a:spcAft>
-                    <a:spcPts val="0"/>
-                  </a:spcAft>
-                  <a:buClrTx/>
-                  <a:buSzTx/>
-                  <a:buFontTx/>
-                  <a:buNone/>
-                  <a:tabLst/>
-                  <a:defRPr/>
-                </a:pPr>
-                <a:endParaRPr lang="en-US" dirty="0"/>
-              </a:p>
               <a:p>
                 <a:endParaRPr lang="en-US" dirty="0"/>
               </a:p>
@@ -1330,319 +1118,6 @@
         <p:txBody>
           <a:bodyPr/>
           <a:lstStyle/>
-          <a:p>
-            <a:endParaRPr lang="en-US" dirty="0"/>
-          </a:p>
-          <a:p>
-            <a:r>
-              <a:rPr lang="en-US" dirty="0"/>
-              <a:t>\begin{split}</a:t>
-            </a:r>
-          </a:p>
-          <a:p>
-            <a:r>
-              <a:rPr lang="en-US" dirty="0"/>
-              <a:t>\dot{x}(t) &amp;= V \cos(\theta(t)), \\</a:t>
-            </a:r>
-          </a:p>
-          <a:p>
-            <a:r>
-              <a:rPr lang="en-US" dirty="0"/>
-              <a:t>\dot{y}(t) &amp;= V \sin(\theta(t)), \\</a:t>
-            </a:r>
-          </a:p>
-          <a:p>
-            <a:r>
-              <a:rPr lang="en-US" dirty="0"/>
-              <a:t>\dot{V}(t) &amp;= a(t), \\</a:t>
-            </a:r>
-          </a:p>
-          <a:p>
-            <a:r>
-              <a:rPr lang="en-US" dirty="0"/>
-              <a:t>\dot{\theta}(t) &amp;= \omega(t),</a:t>
-            </a:r>
-          </a:p>
-          <a:p>
-            <a:r>
-              <a:rPr lang="en-US" dirty="0"/>
-              <a:t>\end{split}</a:t>
-            </a:r>
-          </a:p>
-          <a:p>
-            <a:endParaRPr lang="en-US" dirty="0"/>
-          </a:p>
-          <a:p>
-            <a:pPr marL="0" marR="0" lvl="0" indent="0" algn="l" defTabSz="914400" rtl="0" eaLnBrk="1" fontAlgn="auto" latinLnBrk="0" hangingPunct="1">
-              <a:lnSpc>
-                <a:spcPct val="100000"/>
-              </a:lnSpc>
-              <a:spcBef>
-                <a:spcPts val="0"/>
-              </a:spcBef>
-              <a:spcAft>
-                <a:spcPts val="0"/>
-              </a:spcAft>
-              <a:buClrTx/>
-              <a:buSzTx/>
-              <a:buFontTx/>
-              <a:buNone/>
-              <a:tabLst/>
-              <a:defRPr/>
-            </a:pPr>
-            <a:r>
-              <a:rPr lang="en-US" sz="1200" kern="1200" dirty="0">
-                <a:solidFill>
-                  <a:schemeClr val="tx1"/>
-                </a:solidFill>
-                <a:effectLst/>
-                <a:latin typeface="+mn-lt"/>
-                <a:ea typeface="+mn-ea"/>
-                <a:cs typeface="+mn-cs"/>
-              </a:rPr>
-              <a:t>\begin{</a:t>
-            </a:r>
-            <a:r>
-              <a:rPr lang="en-US" sz="1200" kern="1200" dirty="0" err="1">
-                <a:solidFill>
-                  <a:schemeClr val="tx1"/>
-                </a:solidFill>
-                <a:effectLst/>
-                <a:latin typeface="+mn-lt"/>
-                <a:ea typeface="+mn-ea"/>
-                <a:cs typeface="+mn-cs"/>
-              </a:rPr>
-              <a:t>bmatrix</a:t>
-            </a:r>
-            <a:r>
-              <a:rPr lang="en-US" sz="1200" kern="1200" dirty="0">
-                <a:solidFill>
-                  <a:schemeClr val="tx1"/>
-                </a:solidFill>
-                <a:effectLst/>
-                <a:latin typeface="+mn-lt"/>
-                <a:ea typeface="+mn-ea"/>
-                <a:cs typeface="+mn-cs"/>
-              </a:rPr>
-              <a:t>} \</a:t>
-            </a:r>
-            <a:r>
-              <a:rPr lang="en-US" sz="1200" kern="1200" dirty="0" err="1">
-                <a:solidFill>
-                  <a:schemeClr val="tx1"/>
-                </a:solidFill>
-                <a:effectLst/>
-                <a:latin typeface="+mn-lt"/>
-                <a:ea typeface="+mn-ea"/>
-                <a:cs typeface="+mn-cs"/>
-              </a:rPr>
-              <a:t>ddot</a:t>
-            </a:r>
-            <a:r>
-              <a:rPr lang="en-US" sz="1200" kern="1200" dirty="0">
-                <a:solidFill>
-                  <a:schemeClr val="tx1"/>
-                </a:solidFill>
-                <a:effectLst/>
-                <a:latin typeface="+mn-lt"/>
-                <a:ea typeface="+mn-ea"/>
-                <a:cs typeface="+mn-cs"/>
-              </a:rPr>
-              <a:t>{x}(t) \\ \</a:t>
-            </a:r>
-            <a:r>
-              <a:rPr lang="en-US" sz="1200" kern="1200" dirty="0" err="1">
-                <a:solidFill>
-                  <a:schemeClr val="tx1"/>
-                </a:solidFill>
-                <a:effectLst/>
-                <a:latin typeface="+mn-lt"/>
-                <a:ea typeface="+mn-ea"/>
-                <a:cs typeface="+mn-cs"/>
-              </a:rPr>
-              <a:t>ddot</a:t>
-            </a:r>
-            <a:r>
-              <a:rPr lang="en-US" sz="1200" kern="1200" dirty="0">
-                <a:solidFill>
-                  <a:schemeClr val="tx1"/>
-                </a:solidFill>
-                <a:effectLst/>
-                <a:latin typeface="+mn-lt"/>
-                <a:ea typeface="+mn-ea"/>
-                <a:cs typeface="+mn-cs"/>
-              </a:rPr>
-              <a:t>{y}(t) \end{</a:t>
-            </a:r>
-            <a:r>
-              <a:rPr lang="en-US" sz="1200" kern="1200" dirty="0" err="1">
-                <a:solidFill>
-                  <a:schemeClr val="tx1"/>
-                </a:solidFill>
-                <a:effectLst/>
-                <a:latin typeface="+mn-lt"/>
-                <a:ea typeface="+mn-ea"/>
-                <a:cs typeface="+mn-cs"/>
-              </a:rPr>
-              <a:t>bmatrix</a:t>
-            </a:r>
-            <a:r>
-              <a:rPr lang="en-US" sz="1200" kern="1200" dirty="0">
-                <a:solidFill>
-                  <a:schemeClr val="tx1"/>
-                </a:solidFill>
-                <a:effectLst/>
-                <a:latin typeface="+mn-lt"/>
-                <a:ea typeface="+mn-ea"/>
-                <a:cs typeface="+mn-cs"/>
-              </a:rPr>
-              <a:t>} = \underbrace{\begin{</a:t>
-            </a:r>
-            <a:r>
-              <a:rPr lang="en-US" sz="1200" kern="1200" dirty="0" err="1">
-                <a:solidFill>
-                  <a:schemeClr val="tx1"/>
-                </a:solidFill>
-                <a:effectLst/>
-                <a:latin typeface="+mn-lt"/>
-                <a:ea typeface="+mn-ea"/>
-                <a:cs typeface="+mn-cs"/>
-              </a:rPr>
-              <a:t>bmatrix</a:t>
-            </a:r>
-            <a:r>
-              <a:rPr lang="en-US" sz="1200" kern="1200" dirty="0">
-                <a:solidFill>
-                  <a:schemeClr val="tx1"/>
-                </a:solidFill>
-                <a:effectLst/>
-                <a:latin typeface="+mn-lt"/>
-                <a:ea typeface="+mn-ea"/>
-                <a:cs typeface="+mn-cs"/>
-              </a:rPr>
-              <a:t>} \cos(\theta) &amp; -V\sin(\theta) \\ \sin(\theta) &amp; V\cos(\theta) \end{</a:t>
-            </a:r>
-            <a:r>
-              <a:rPr lang="en-US" sz="1200" kern="1200" dirty="0" err="1">
-                <a:solidFill>
-                  <a:schemeClr val="tx1"/>
-                </a:solidFill>
-                <a:effectLst/>
-                <a:latin typeface="+mn-lt"/>
-                <a:ea typeface="+mn-ea"/>
-                <a:cs typeface="+mn-cs"/>
-              </a:rPr>
-              <a:t>bmatrix</a:t>
-            </a:r>
-            <a:r>
-              <a:rPr lang="en-US" sz="1200" kern="1200" dirty="0">
-                <a:solidFill>
-                  <a:schemeClr val="tx1"/>
-                </a:solidFill>
-                <a:effectLst/>
-                <a:latin typeface="+mn-lt"/>
-                <a:ea typeface="+mn-ea"/>
-                <a:cs typeface="+mn-cs"/>
-              </a:rPr>
-              <a:t>}}_{:=J} \begin{</a:t>
-            </a:r>
-            <a:r>
-              <a:rPr lang="en-US" sz="1200" kern="1200" dirty="0" err="1">
-                <a:solidFill>
-                  <a:schemeClr val="tx1"/>
-                </a:solidFill>
-                <a:effectLst/>
-                <a:latin typeface="+mn-lt"/>
-                <a:ea typeface="+mn-ea"/>
-                <a:cs typeface="+mn-cs"/>
-              </a:rPr>
-              <a:t>bmatrix</a:t>
-            </a:r>
-            <a:r>
-              <a:rPr lang="en-US" sz="1200" kern="1200" dirty="0">
-                <a:solidFill>
-                  <a:schemeClr val="tx1"/>
-                </a:solidFill>
-                <a:effectLst/>
-                <a:latin typeface="+mn-lt"/>
-                <a:ea typeface="+mn-ea"/>
-                <a:cs typeface="+mn-cs"/>
-              </a:rPr>
-              <a:t>} a \\ \omega \end{</a:t>
-            </a:r>
-            <a:r>
-              <a:rPr lang="en-US" sz="1200" kern="1200" dirty="0" err="1">
-                <a:solidFill>
-                  <a:schemeClr val="tx1"/>
-                </a:solidFill>
-                <a:effectLst/>
-                <a:latin typeface="+mn-lt"/>
-                <a:ea typeface="+mn-ea"/>
-                <a:cs typeface="+mn-cs"/>
-              </a:rPr>
-              <a:t>bmatrix</a:t>
-            </a:r>
-            <a:r>
-              <a:rPr lang="en-US" sz="1200" kern="1200" dirty="0">
-                <a:solidFill>
-                  <a:schemeClr val="tx1"/>
-                </a:solidFill>
-                <a:effectLst/>
-                <a:latin typeface="+mn-lt"/>
-                <a:ea typeface="+mn-ea"/>
-                <a:cs typeface="+mn-cs"/>
-              </a:rPr>
-              <a:t>} := \begin{</a:t>
-            </a:r>
-            <a:r>
-              <a:rPr lang="en-US" sz="1200" kern="1200" dirty="0" err="1">
-                <a:solidFill>
-                  <a:schemeClr val="tx1"/>
-                </a:solidFill>
-                <a:effectLst/>
-                <a:latin typeface="+mn-lt"/>
-                <a:ea typeface="+mn-ea"/>
-                <a:cs typeface="+mn-cs"/>
-              </a:rPr>
-              <a:t>bmatrix</a:t>
-            </a:r>
-            <a:r>
-              <a:rPr lang="en-US" sz="1200" kern="1200" dirty="0">
-                <a:solidFill>
-                  <a:schemeClr val="tx1"/>
-                </a:solidFill>
-                <a:effectLst/>
-                <a:latin typeface="+mn-lt"/>
-                <a:ea typeface="+mn-ea"/>
-                <a:cs typeface="+mn-cs"/>
-              </a:rPr>
-              <a:t>} w_1 \\ w_2 \end{</a:t>
-            </a:r>
-            <a:r>
-              <a:rPr lang="en-US" sz="1200" kern="1200" dirty="0" err="1">
-                <a:solidFill>
-                  <a:schemeClr val="tx1"/>
-                </a:solidFill>
-                <a:effectLst/>
-                <a:latin typeface="+mn-lt"/>
-                <a:ea typeface="+mn-ea"/>
-                <a:cs typeface="+mn-cs"/>
-              </a:rPr>
-              <a:t>bmatrix</a:t>
-            </a:r>
-            <a:r>
-              <a:rPr lang="en-US" sz="1200" kern="1200" dirty="0">
-                <a:solidFill>
-                  <a:schemeClr val="tx1"/>
-                </a:solidFill>
-                <a:effectLst/>
-                <a:latin typeface="+mn-lt"/>
-                <a:ea typeface="+mn-ea"/>
-                <a:cs typeface="+mn-cs"/>
-              </a:rPr>
-              <a:t>} .</a:t>
-            </a:r>
-          </a:p>
           <a:p>
             <a:endParaRPr lang="en-US" dirty="0"/>
           </a:p>
@@ -1981,7 +1456,7 @@
           <a:p>
             <a:fld id="{3659F107-29BB-4A40-9AC2-9F85A28E4681}" type="datetime1">
               <a:rPr lang="en-US" smtClean="0"/>
-              <a:t>12/20/2025</a:t>
+              <a:t>8/13/26</a:t>
             </a:fld>
             <a:endParaRPr lang="en-US" dirty="0"/>
           </a:p>
@@ -2235,7 +1710,7 @@
           <a:p>
             <a:fld id="{183C1811-D94F-C644-AA80-85B5ED10AC84}" type="datetime1">
               <a:rPr lang="en-US" smtClean="0"/>
-              <a:t>12/20/2025</a:t>
+              <a:t>8/13/26</a:t>
             </a:fld>
             <a:endParaRPr lang="en-US"/>
           </a:p>
@@ -2506,7 +1981,7 @@
           <a:p>
             <a:fld id="{1C468E37-3D51-A44F-87DA-0A126A9EB8A6}" type="datetime1">
               <a:rPr lang="en-US" smtClean="0"/>
-              <a:t>12/20/2025</a:t>
+              <a:t>8/13/26</a:t>
             </a:fld>
             <a:endParaRPr lang="en-US"/>
           </a:p>
@@ -3093,7 +2568,7 @@
           <a:p>
             <a:fld id="{1CEE22CF-A28A-FC4C-8669-97040D70243A}" type="datetime1">
               <a:rPr lang="en-US" smtClean="0"/>
-              <a:t>12/20/2025</a:t>
+              <a:t>8/13/26</a:t>
             </a:fld>
             <a:endParaRPr lang="en-US"/>
           </a:p>
@@ -3271,7 +2746,7 @@
           <a:p>
             <a:fld id="{8565A9C9-4263-1C47-9533-64594B12B5AC}" type="datetime1">
               <a:rPr lang="en-US" smtClean="0"/>
-              <a:t>12/20/2025</a:t>
+              <a:t>8/13/26</a:t>
             </a:fld>
             <a:endParaRPr lang="en-US"/>
           </a:p>
@@ -3428,8 +2903,8 @@
                       <m:accPr>
                         <m:chr m:val="̇"/>
                         <m:ctrlPr>
-                          <a:rPr lang="en-US" b="1" i="1" smtClean="0">
-                            <a:latin typeface="Cambria Math" panose="02040503050406030204" pitchFamily="18" charset="0"/>
+                          <a:rPr lang="en-US" b="1">
+                            <a:latin typeface="Cambria Math" charset="0"/>
                           </a:rPr>
                         </m:ctrlPr>
                       </m:accPr>
@@ -3445,7 +2920,7 @@
                     <m:d>
                       <m:dPr>
                         <m:ctrlPr>
-                          <a:rPr lang="en-US" b="1" i="1" smtClean="0">
+                          <a:rPr lang="en-US" b="0" i="1" smtClean="0">
                             <a:latin typeface="Cambria Math" panose="02040503050406030204" pitchFamily="18" charset="0"/>
                           </a:rPr>
                         </m:ctrlPr>
@@ -3480,7 +2955,7 @@
                     <m:d>
                       <m:dPr>
                         <m:ctrlPr>
-                          <a:rPr lang="en-US" b="1" i="1" dirty="0" smtClean="0">
+                          <a:rPr lang="en-US" b="0" i="1" dirty="0" smtClean="0">
                             <a:latin typeface="Cambria Math" panose="02040503050406030204" pitchFamily="18" charset="0"/>
                           </a:rPr>
                         </m:ctrlPr>
@@ -3577,7 +3052,7 @@
                     <m:sSub>
                       <m:sSubPr>
                         <m:ctrlPr>
-                          <a:rPr lang="en-US" b="1" i="1" dirty="0" smtClean="0">
+                          <a:rPr lang="en-US" b="1" i="0" dirty="0" smtClean="0">
                             <a:latin typeface="Cambria Math" panose="02040503050406030204" pitchFamily="18" charset="0"/>
                           </a:rPr>
                         </m:ctrlPr>
@@ -3608,7 +3083,7 @@
                     <m:sSub>
                       <m:sSubPr>
                         <m:ctrlPr>
-                          <a:rPr lang="en-US" i="1" dirty="0" smtClean="0">
+                          <a:rPr lang="en-US" b="0" i="1" dirty="0" smtClean="0">
                             <a:latin typeface="Cambria Math" panose="02040503050406030204" pitchFamily="18" charset="0"/>
                           </a:rPr>
                         </m:ctrlPr>
@@ -3633,7 +3108,7 @@
                     <m:sSub>
                       <m:sSubPr>
                         <m:ctrlPr>
-                          <a:rPr lang="en-US" b="1" i="1" dirty="0" smtClean="0">
+                          <a:rPr lang="en-US" b="1" i="0" dirty="0" smtClean="0">
                             <a:latin typeface="Cambria Math" panose="02040503050406030204" pitchFamily="18" charset="0"/>
                           </a:rPr>
                         </m:ctrlPr>
@@ -3666,7 +3141,7 @@
                     <m:sSub>
                       <m:sSubPr>
                         <m:ctrlPr>
-                          <a:rPr lang="en-US" i="1" dirty="0">
+                          <a:rPr lang="en-US" b="0" i="1" dirty="0">
                             <a:latin typeface="Cambria Math" panose="02040503050406030204" pitchFamily="18" charset="0"/>
                           </a:rPr>
                         </m:ctrlPr>
@@ -3697,7 +3172,7 @@
                     <m:sSup>
                       <m:sSupPr>
                         <m:ctrlPr>
-                          <a:rPr lang="en-US" b="1" i="1" dirty="0" smtClean="0">
+                          <a:rPr lang="en-US" b="0" i="1" dirty="0" smtClean="0">
                             <a:latin typeface="Cambria Math" panose="02040503050406030204" pitchFamily="18" charset="0"/>
                           </a:rPr>
                         </m:ctrlPr>
@@ -3734,7 +3209,7 @@
                     <m:sSup>
                       <m:sSupPr>
                         <m:ctrlPr>
-                          <a:rPr lang="en-US" b="1" i="1" dirty="0" smtClean="0">
+                          <a:rPr lang="en-US" b="0" i="1" dirty="0" smtClean="0">
                             <a:latin typeface="Cambria Math" panose="02040503050406030204" pitchFamily="18" charset="0"/>
                           </a:rPr>
                         </m:ctrlPr>
@@ -3759,7 +3234,7 @@
                     <m:sSub>
                       <m:sSubPr>
                         <m:ctrlPr>
-                          <a:rPr lang="en-US" i="1" dirty="0" smtClean="0">
+                          <a:rPr lang="en-US" b="0" i="1" dirty="0" smtClean="0">
                             <a:latin typeface="Cambria Math" panose="02040503050406030204" pitchFamily="18" charset="0"/>
                           </a:rPr>
                         </m:ctrlPr>
@@ -3838,7 +3313,7 @@
                     <m:sSub>
                       <m:sSubPr>
                         <m:ctrlPr>
-                          <a:rPr lang="en-US" i="1" smtClean="0">
+                          <a:rPr lang="en-US" i="1">
                             <a:latin typeface="Cambria Math" panose="02040503050406030204" pitchFamily="18" charset="0"/>
                           </a:rPr>
                         </m:ctrlPr>
@@ -3848,7 +3323,7 @@
                           <m:accPr>
                             <m:chr m:val="̇"/>
                             <m:ctrlPr>
-                              <a:rPr lang="en-US" i="1">
+                              <a:rPr lang="en-US" b="0" i="1" smtClean="0">
                                 <a:latin typeface="Cambria Math" panose="02040503050406030204" pitchFamily="18" charset="0"/>
                               </a:rPr>
                             </m:ctrlPr>
@@ -4155,8 +3630,8 @@
                       <m:accPr>
                         <m:chr m:val="̇"/>
                         <m:ctrlPr>
-                          <a:rPr lang="en-US" b="1" i="1" smtClean="0">
-                            <a:latin typeface="Cambria Math" panose="02040503050406030204" pitchFamily="18" charset="0"/>
+                          <a:rPr lang="en-US" b="1">
+                            <a:latin typeface="Cambria Math" charset="0"/>
                           </a:rPr>
                         </m:ctrlPr>
                       </m:accPr>
@@ -4172,7 +3647,7 @@
                     <m:d>
                       <m:dPr>
                         <m:ctrlPr>
-                          <a:rPr lang="en-US" b="1" i="1" smtClean="0">
+                          <a:rPr lang="en-US" b="0" i="1" smtClean="0">
                             <a:latin typeface="Cambria Math" panose="02040503050406030204" pitchFamily="18" charset="0"/>
                           </a:rPr>
                         </m:ctrlPr>
@@ -4234,7 +3709,7 @@
                     <m:d>
                       <m:dPr>
                         <m:ctrlPr>
-                          <a:rPr lang="en-US" b="1" i="1" dirty="0" smtClean="0">
+                          <a:rPr lang="en-US" b="0" i="1" dirty="0" smtClean="0">
                             <a:latin typeface="Cambria Math" panose="02040503050406030204" pitchFamily="18" charset="0"/>
                           </a:rPr>
                         </m:ctrlPr>
@@ -4464,7 +3939,7 @@
           <a:p>
             <a:fld id="{3AF4018B-565F-5E4C-A459-02419AEA5C4A}" type="datetime1">
               <a:rPr lang="en-US" smtClean="0"/>
-              <a:t>12/20/2025</a:t>
+              <a:t>8/13/26</a:t>
             </a:fld>
             <a:endParaRPr lang="en-US"/>
           </a:p>
@@ -4657,8 +4132,8 @@
                       <m:accPr>
                         <m:chr m:val="̇"/>
                         <m:ctrlPr>
-                          <a:rPr lang="en-US" b="1" i="1" smtClean="0">
-                            <a:latin typeface="Cambria Math" panose="02040503050406030204" pitchFamily="18" charset="0"/>
+                          <a:rPr lang="en-US" b="1">
+                            <a:latin typeface="Cambria Math" charset="0"/>
                           </a:rPr>
                         </m:ctrlPr>
                       </m:accPr>
@@ -4674,7 +4149,7 @@
                     <m:d>
                       <m:dPr>
                         <m:ctrlPr>
-                          <a:rPr lang="en-US" b="1" i="1" smtClean="0">
+                          <a:rPr lang="en-US" b="0" i="1" smtClean="0">
                             <a:latin typeface="Cambria Math" panose="02040503050406030204" pitchFamily="18" charset="0"/>
                           </a:rPr>
                         </m:ctrlPr>
@@ -4709,7 +4184,7 @@
                     <m:d>
                       <m:dPr>
                         <m:ctrlPr>
-                          <a:rPr lang="en-US" b="1" i="1" dirty="0" smtClean="0">
+                          <a:rPr lang="en-US" b="0" i="1" dirty="0" smtClean="0">
                             <a:latin typeface="Cambria Math" panose="02040503050406030204" pitchFamily="18" charset="0"/>
                           </a:rPr>
                         </m:ctrlPr>
@@ -4785,7 +4260,7 @@
                         <m:d>
                           <m:dPr>
                             <m:ctrlPr>
-                              <a:rPr lang="en-US" b="0" i="1" dirty="0" smtClean="0">
+                              <a:rPr lang="en-US" b="1" i="1" dirty="0" smtClean="0">
                                 <a:latin typeface="Cambria Math" panose="02040503050406030204" pitchFamily="18" charset="0"/>
                               </a:rPr>
                             </m:ctrlPr>
@@ -4794,7 +4269,7 @@
                             <m:sSub>
                               <m:sSubPr>
                                 <m:ctrlPr>
-                                  <a:rPr lang="en-US" b="1" i="1" dirty="0" smtClean="0">
+                                  <a:rPr lang="en-US" b="1" dirty="0">
                                     <a:latin typeface="Cambria Math" panose="02040503050406030204" pitchFamily="18" charset="0"/>
                                   </a:rPr>
                                 </m:ctrlPr>
@@ -4819,7 +4294,7 @@
                             <m:d>
                               <m:dPr>
                                 <m:ctrlPr>
-                                  <a:rPr lang="en-US" b="1" i="1" dirty="0">
+                                  <a:rPr lang="en-US" i="1" dirty="0">
                                     <a:latin typeface="Cambria Math" panose="02040503050406030204" pitchFamily="18" charset="0"/>
                                   </a:rPr>
                                 </m:ctrlPr>
@@ -4842,7 +4317,7 @@
                             <m:sSub>
                               <m:sSubPr>
                                 <m:ctrlPr>
-                                  <a:rPr lang="en-US" b="1" i="1" dirty="0">
+                                  <a:rPr lang="en-US" b="1" i="0" dirty="0" smtClean="0">
                                     <a:latin typeface="Cambria Math" panose="02040503050406030204" pitchFamily="18" charset="0"/>
                                   </a:rPr>
                                 </m:ctrlPr>
@@ -4867,7 +4342,7 @@
                             <m:d>
                               <m:dPr>
                                 <m:ctrlPr>
-                                  <a:rPr lang="en-US" b="1" i="1" dirty="0">
+                                  <a:rPr lang="en-US" i="1" dirty="0">
                                     <a:latin typeface="Cambria Math" panose="02040503050406030204" pitchFamily="18" charset="0"/>
                                   </a:rPr>
                                 </m:ctrlPr>
@@ -4919,7 +4394,7 @@
                     <m:d>
                       <m:dPr>
                         <m:ctrlPr>
-                          <a:rPr lang="en-US" b="1" i="1" dirty="0">
+                          <a:rPr lang="en-US" i="1" dirty="0">
                             <a:latin typeface="Cambria Math" panose="02040503050406030204" pitchFamily="18" charset="0"/>
                           </a:rPr>
                         </m:ctrlPr>
@@ -4948,7 +4423,7 @@
                     <m:d>
                       <m:dPr>
                         <m:ctrlPr>
-                          <a:rPr lang="en-US" b="1" i="1" dirty="0">
+                          <a:rPr lang="en-US" i="1" dirty="0">
                             <a:latin typeface="Cambria Math" panose="02040503050406030204" pitchFamily="18" charset="0"/>
                           </a:rPr>
                         </m:ctrlPr>
@@ -4971,7 +4446,7 @@
                     <m:sSub>
                       <m:sSubPr>
                         <m:ctrlPr>
-                          <a:rPr lang="en-US" b="1" i="1" dirty="0">
+                          <a:rPr lang="en-US" b="1" dirty="0">
                             <a:latin typeface="Cambria Math" panose="02040503050406030204" pitchFamily="18" charset="0"/>
                           </a:rPr>
                         </m:ctrlPr>
@@ -4996,7 +4471,7 @@
                     <m:d>
                       <m:dPr>
                         <m:ctrlPr>
-                          <a:rPr lang="en-US" b="1" i="1" dirty="0">
+                          <a:rPr lang="en-US" i="1" dirty="0">
                             <a:latin typeface="Cambria Math" panose="02040503050406030204" pitchFamily="18" charset="0"/>
                           </a:rPr>
                         </m:ctrlPr>
@@ -5046,7 +4521,7 @@
                     <m:d>
                       <m:dPr>
                         <m:ctrlPr>
-                          <a:rPr lang="en-US" b="1" i="1" dirty="0">
+                          <a:rPr lang="en-US" i="1" dirty="0">
                             <a:latin typeface="Cambria Math" panose="02040503050406030204" pitchFamily="18" charset="0"/>
                           </a:rPr>
                         </m:ctrlPr>
@@ -5075,7 +4550,7 @@
                     <m:d>
                       <m:dPr>
                         <m:ctrlPr>
-                          <a:rPr lang="en-US" b="1" i="1" dirty="0">
+                          <a:rPr lang="en-US" i="1" dirty="0">
                             <a:latin typeface="Cambria Math" panose="02040503050406030204" pitchFamily="18" charset="0"/>
                           </a:rPr>
                         </m:ctrlPr>
@@ -5098,7 +4573,7 @@
                     <m:sSub>
                       <m:sSubPr>
                         <m:ctrlPr>
-                          <a:rPr lang="en-US" b="1" i="1" dirty="0">
+                          <a:rPr lang="en-US" b="1" dirty="0">
                             <a:latin typeface="Cambria Math" panose="02040503050406030204" pitchFamily="18" charset="0"/>
                           </a:rPr>
                         </m:ctrlPr>
@@ -5123,7 +4598,7 @@
                     <m:d>
                       <m:dPr>
                         <m:ctrlPr>
-                          <a:rPr lang="en-US" b="1" i="1" dirty="0">
+                          <a:rPr lang="en-US" i="1" dirty="0">
                             <a:latin typeface="Cambria Math" panose="02040503050406030204" pitchFamily="18" charset="0"/>
                           </a:rPr>
                         </m:ctrlPr>
@@ -5157,10 +4632,7 @@
                 </a:pPr>
                 <a14:m>
                   <m:oMathPara xmlns:m="http://schemas.openxmlformats.org/officeDocument/2006/math">
-                    <m:oMathParaPr>
-                      <m:jc m:val="centerGroup"/>
-                    </m:oMathParaPr>
-                    <m:oMath xmlns:m="http://schemas.openxmlformats.org/officeDocument/2006/math">
+                    <m:oMath>
                       <m:r>
                         <a:rPr lang="en-US" b="0" i="1" smtClean="0">
                           <a:latin typeface="Cambria Math" panose="02040503050406030204" pitchFamily="18" charset="0"/>
@@ -5171,8 +4643,8 @@
                         <m:accPr>
                           <m:chr m:val="̇"/>
                           <m:ctrlPr>
-                            <a:rPr lang="en-US" b="1" i="1" smtClean="0">
-                              <a:latin typeface="Cambria Math" panose="02040503050406030204" pitchFamily="18" charset="0"/>
+                            <a:rPr lang="en-US" b="1">
+                              <a:latin typeface="Cambria Math" charset="0"/>
                             </a:rPr>
                           </m:ctrlPr>
                         </m:accPr>
@@ -5188,7 +4660,7 @@
                       <m:d>
                         <m:dPr>
                           <m:ctrlPr>
-                            <a:rPr lang="en-US" b="1" i="1" smtClean="0">
+                            <a:rPr lang="en-US" b="0" i="1" smtClean="0">
                               <a:latin typeface="Cambria Math" panose="02040503050406030204" pitchFamily="18" charset="0"/>
                             </a:rPr>
                           </m:ctrlPr>
@@ -5229,7 +4701,7 @@
                       <m:d>
                         <m:dPr>
                           <m:ctrlPr>
-                            <a:rPr lang="en-US" b="1" i="1" dirty="0" smtClean="0">
+                            <a:rPr lang="en-US" b="0" i="1" dirty="0" smtClean="0">
                               <a:latin typeface="Cambria Math" panose="02040503050406030204" pitchFamily="18" charset="0"/>
                             </a:rPr>
                           </m:ctrlPr>
@@ -5324,7 +4796,7 @@
                     <m:sSub>
                       <m:sSubPr>
                         <m:ctrlPr>
-                          <a:rPr lang="en-US" b="1" i="1" dirty="0" smtClean="0">
+                          <a:rPr lang="en-US" b="1" i="0" dirty="0" smtClean="0">
                             <a:latin typeface="Cambria Math" panose="02040503050406030204" pitchFamily="18" charset="0"/>
                           </a:rPr>
                         </m:ctrlPr>
@@ -5355,7 +4827,7 @@
                     <m:sSub>
                       <m:sSubPr>
                         <m:ctrlPr>
-                          <a:rPr lang="en-US" i="1" dirty="0" smtClean="0">
+                          <a:rPr lang="en-US" b="0" i="1" dirty="0" smtClean="0">
                             <a:latin typeface="Cambria Math" panose="02040503050406030204" pitchFamily="18" charset="0"/>
                           </a:rPr>
                         </m:ctrlPr>
@@ -5394,7 +4866,7 @@
                     <m:sSub>
                       <m:sSubPr>
                         <m:ctrlPr>
-                          <a:rPr lang="en-US" b="1" i="1" dirty="0" smtClean="0">
+                          <a:rPr lang="en-US" b="1" i="0" dirty="0" smtClean="0">
                             <a:latin typeface="Cambria Math" panose="02040503050406030204" pitchFamily="18" charset="0"/>
                           </a:rPr>
                         </m:ctrlPr>
@@ -5466,7 +4938,7 @@
                     <m:d>
                       <m:dPr>
                         <m:ctrlPr>
-                          <a:rPr lang="en-US" b="1" i="1" dirty="0">
+                          <a:rPr lang="en-US" i="1" dirty="0">
                             <a:latin typeface="Cambria Math" panose="02040503050406030204" pitchFamily="18" charset="0"/>
                           </a:rPr>
                         </m:ctrlPr>
@@ -5497,7 +4969,7 @@
                     <m:sSub>
                       <m:sSubPr>
                         <m:ctrlPr>
-                          <a:rPr lang="en-US" b="1" i="1" dirty="0">
+                          <a:rPr lang="en-US" b="1" dirty="0">
                             <a:latin typeface="Cambria Math" panose="02040503050406030204" pitchFamily="18" charset="0"/>
                           </a:rPr>
                         </m:ctrlPr>
@@ -5522,7 +4994,7 @@
                     <m:d>
                       <m:dPr>
                         <m:ctrlPr>
-                          <a:rPr lang="en-US" b="1" i="1" dirty="0" smtClean="0">
+                          <a:rPr lang="en-US" i="1" dirty="0">
                             <a:latin typeface="Cambria Math" panose="02040503050406030204" pitchFamily="18" charset="0"/>
                           </a:rPr>
                         </m:ctrlPr>
@@ -5565,7 +5037,7 @@
                     <m:d>
                       <m:dPr>
                         <m:ctrlPr>
-                          <a:rPr lang="en-US" b="1" i="1" dirty="0">
+                          <a:rPr lang="en-US" i="1" dirty="0">
                             <a:latin typeface="Cambria Math" panose="02040503050406030204" pitchFamily="18" charset="0"/>
                           </a:rPr>
                         </m:ctrlPr>
@@ -5659,7 +5131,7 @@
           <a:p>
             <a:fld id="{A9146A20-D6CA-4840-B038-86B76654555E}" type="datetime1">
               <a:rPr lang="en-US" smtClean="0"/>
-              <a:t>12/20/2025</a:t>
+              <a:t>8/13/26</a:t>
             </a:fld>
             <a:endParaRPr lang="en-US"/>
           </a:p>
@@ -5864,8 +5336,8 @@
                       <m:accPr>
                         <m:chr m:val="̇"/>
                         <m:ctrlPr>
-                          <a:rPr lang="en-US" b="1" i="1" smtClean="0">
-                            <a:latin typeface="Cambria Math" panose="02040503050406030204" pitchFamily="18" charset="0"/>
+                          <a:rPr lang="en-US" b="1">
+                            <a:latin typeface="Cambria Math" charset="0"/>
                           </a:rPr>
                         </m:ctrlPr>
                       </m:accPr>
@@ -5881,7 +5353,7 @@
                     <m:d>
                       <m:dPr>
                         <m:ctrlPr>
-                          <a:rPr lang="en-US" b="1" i="1" smtClean="0">
+                          <a:rPr lang="en-US" b="0" i="1" smtClean="0">
                             <a:latin typeface="Cambria Math" panose="02040503050406030204" pitchFamily="18" charset="0"/>
                           </a:rPr>
                         </m:ctrlPr>
@@ -5922,7 +5394,7 @@
                     <m:d>
                       <m:dPr>
                         <m:ctrlPr>
-                          <a:rPr lang="en-US" b="1" i="1" dirty="0" smtClean="0">
+                          <a:rPr lang="en-US" b="0" i="1" dirty="0" smtClean="0">
                             <a:latin typeface="Cambria Math" panose="02040503050406030204" pitchFamily="18" charset="0"/>
                           </a:rPr>
                         </m:ctrlPr>
@@ -5951,7 +5423,7 @@
                     <m:d>
                       <m:dPr>
                         <m:ctrlPr>
-                          <a:rPr lang="en-US" b="1" i="1" dirty="0">
+                          <a:rPr lang="en-US" i="1" dirty="0">
                             <a:latin typeface="Cambria Math" panose="02040503050406030204" pitchFamily="18" charset="0"/>
                           </a:rPr>
                         </m:ctrlPr>
@@ -5997,7 +5469,7 @@
                         <m:d>
                           <m:dPr>
                             <m:ctrlPr>
-                              <a:rPr lang="en-US" b="0" i="1" dirty="0" smtClean="0">
+                              <a:rPr lang="en-US" b="1" i="1" dirty="0" smtClean="0">
                                 <a:latin typeface="Cambria Math" panose="02040503050406030204" pitchFamily="18" charset="0"/>
                               </a:rPr>
                             </m:ctrlPr>
@@ -6006,7 +5478,7 @@
                             <m:sSub>
                               <m:sSubPr>
                                 <m:ctrlPr>
-                                  <a:rPr lang="en-US" b="1" i="1" dirty="0" smtClean="0">
+                                  <a:rPr lang="en-US" b="1" dirty="0">
                                     <a:latin typeface="Cambria Math" panose="02040503050406030204" pitchFamily="18" charset="0"/>
                                   </a:rPr>
                                 </m:ctrlPr>
@@ -6031,7 +5503,7 @@
                             <m:d>
                               <m:dPr>
                                 <m:ctrlPr>
-                                  <a:rPr lang="en-US" b="1" i="1" dirty="0">
+                                  <a:rPr lang="en-US" i="1" dirty="0">
                                     <a:latin typeface="Cambria Math" panose="02040503050406030204" pitchFamily="18" charset="0"/>
                                   </a:rPr>
                                 </m:ctrlPr>
@@ -6054,7 +5526,7 @@
                             <m:sSub>
                               <m:sSubPr>
                                 <m:ctrlPr>
-                                  <a:rPr lang="en-US" b="1" i="1" dirty="0">
+                                  <a:rPr lang="en-US" b="1" i="0" dirty="0" smtClean="0">
                                     <a:latin typeface="Cambria Math" panose="02040503050406030204" pitchFamily="18" charset="0"/>
                                   </a:rPr>
                                 </m:ctrlPr>
@@ -6079,7 +5551,7 @@
                             <m:d>
                               <m:dPr>
                                 <m:ctrlPr>
-                                  <a:rPr lang="en-US" b="1" i="1" dirty="0">
+                                  <a:rPr lang="en-US" i="1" dirty="0">
                                     <a:latin typeface="Cambria Math" panose="02040503050406030204" pitchFamily="18" charset="0"/>
                                   </a:rPr>
                                 </m:ctrlPr>
@@ -6136,7 +5608,7 @@
                         <m:d>
                           <m:dPr>
                             <m:ctrlPr>
-                              <a:rPr lang="en-US" b="0" i="1" dirty="0" smtClean="0">
+                              <a:rPr lang="en-US" b="1" i="1" dirty="0" smtClean="0">
                                 <a:latin typeface="Cambria Math" panose="02040503050406030204" pitchFamily="18" charset="0"/>
                               </a:rPr>
                             </m:ctrlPr>
@@ -6145,7 +5617,7 @@
                             <m:sSub>
                               <m:sSubPr>
                                 <m:ctrlPr>
-                                  <a:rPr lang="en-US" b="1" i="1" dirty="0" smtClean="0">
+                                  <a:rPr lang="en-US" b="1" dirty="0">
                                     <a:latin typeface="Cambria Math" panose="02040503050406030204" pitchFamily="18" charset="0"/>
                                   </a:rPr>
                                 </m:ctrlPr>
@@ -6170,7 +5642,7 @@
                             <m:d>
                               <m:dPr>
                                 <m:ctrlPr>
-                                  <a:rPr lang="en-US" b="1" i="1" dirty="0">
+                                  <a:rPr lang="en-US" i="1" dirty="0">
                                     <a:latin typeface="Cambria Math" panose="02040503050406030204" pitchFamily="18" charset="0"/>
                                   </a:rPr>
                                 </m:ctrlPr>
@@ -6193,7 +5665,7 @@
                             <m:sSub>
                               <m:sSubPr>
                                 <m:ctrlPr>
-                                  <a:rPr lang="en-US" b="1" i="1" dirty="0">
+                                  <a:rPr lang="en-US" b="1" i="0" dirty="0" smtClean="0">
                                     <a:latin typeface="Cambria Math" panose="02040503050406030204" pitchFamily="18" charset="0"/>
                                   </a:rPr>
                                 </m:ctrlPr>
@@ -6218,7 +5690,7 @@
                             <m:d>
                               <m:dPr>
                                 <m:ctrlPr>
-                                  <a:rPr lang="en-US" b="1" i="1" dirty="0">
+                                  <a:rPr lang="en-US" i="1" dirty="0">
                                     <a:latin typeface="Cambria Math" panose="02040503050406030204" pitchFamily="18" charset="0"/>
                                   </a:rPr>
                                 </m:ctrlPr>
@@ -6261,8 +5733,8 @@
                       <m:accPr>
                         <m:chr m:val="̇"/>
                         <m:ctrlPr>
-                          <a:rPr lang="en-US" sz="1800" b="1" i="1" smtClean="0">
-                            <a:latin typeface="Cambria Math" panose="02040503050406030204" pitchFamily="18" charset="0"/>
+                          <a:rPr lang="en-US" sz="1800" b="1">
+                            <a:latin typeface="Cambria Math" charset="0"/>
                           </a:rPr>
                         </m:ctrlPr>
                       </m:accPr>
@@ -6278,7 +5750,7 @@
                     <m:d>
                       <m:dPr>
                         <m:ctrlPr>
-                          <a:rPr lang="en-US" sz="1800" b="1" i="1" smtClean="0">
+                          <a:rPr lang="en-US" sz="1800" b="0" i="1" smtClean="0">
                             <a:latin typeface="Cambria Math" panose="02040503050406030204" pitchFamily="18" charset="0"/>
                           </a:rPr>
                         </m:ctrlPr>
@@ -6316,7 +5788,7 @@
                     <m:d>
                       <m:dPr>
                         <m:ctrlPr>
-                          <a:rPr lang="en-US" sz="1800" b="1" i="1" dirty="0">
+                          <a:rPr lang="en-US" sz="1800" b="1" i="1" dirty="0" smtClean="0">
                             <a:latin typeface="Cambria Math" panose="02040503050406030204" pitchFamily="18" charset="0"/>
                           </a:rPr>
                         </m:ctrlPr>
@@ -6325,7 +5797,7 @@
                         <m:sSub>
                           <m:sSubPr>
                             <m:ctrlPr>
-                              <a:rPr lang="en-US" sz="1800" b="1" i="1" dirty="0" smtClean="0">
+                              <a:rPr lang="en-US" sz="1800" b="1" dirty="0">
                                 <a:latin typeface="Cambria Math" panose="02040503050406030204" pitchFamily="18" charset="0"/>
                               </a:rPr>
                             </m:ctrlPr>
@@ -6350,7 +5822,7 @@
                         <m:d>
                           <m:dPr>
                             <m:ctrlPr>
-                              <a:rPr lang="en-US" sz="1800" b="1" i="1" dirty="0">
+                              <a:rPr lang="en-US" sz="1800" i="1" dirty="0">
                                 <a:latin typeface="Cambria Math" panose="02040503050406030204" pitchFamily="18" charset="0"/>
                               </a:rPr>
                             </m:ctrlPr>
@@ -6373,7 +5845,7 @@
                         <m:sSub>
                           <m:sSubPr>
                             <m:ctrlPr>
-                              <a:rPr lang="en-US" sz="1800" b="1" i="1" dirty="0" smtClean="0">
+                              <a:rPr lang="en-US" sz="1800" b="1" dirty="0">
                                 <a:latin typeface="Cambria Math" panose="02040503050406030204" pitchFamily="18" charset="0"/>
                               </a:rPr>
                             </m:ctrlPr>
@@ -6398,7 +5870,7 @@
                         <m:d>
                           <m:dPr>
                             <m:ctrlPr>
-                              <a:rPr lang="en-US" sz="1800" b="1" i="1" dirty="0">
+                              <a:rPr lang="en-US" sz="1800" i="1" dirty="0">
                                 <a:latin typeface="Cambria Math" panose="02040503050406030204" pitchFamily="18" charset="0"/>
                               </a:rPr>
                             </m:ctrlPr>
@@ -6425,6 +5897,7 @@
                         <m:ctrlPr>
                           <a:rPr lang="en-US" sz="1800" b="0" i="1" dirty="0" smtClean="0">
                             <a:latin typeface="Cambria Math" panose="02040503050406030204" pitchFamily="18" charset="0"/>
+                            <a:ea typeface="Cambria Math" panose="02040503050406030204" pitchFamily="18" charset="0"/>
                           </a:rPr>
                         </m:ctrlPr>
                       </m:fPr>
@@ -6462,7 +5935,7 @@
                     <m:d>
                       <m:dPr>
                         <m:ctrlPr>
-                          <a:rPr lang="en-US" sz="1800" b="0" i="1" dirty="0" smtClean="0">
+                          <a:rPr lang="en-US" sz="1800" b="1" i="1" dirty="0">
                             <a:latin typeface="Cambria Math" panose="02040503050406030204" pitchFamily="18" charset="0"/>
                           </a:rPr>
                         </m:ctrlPr>
@@ -6471,7 +5944,7 @@
                         <m:sSub>
                           <m:sSubPr>
                             <m:ctrlPr>
-                              <a:rPr lang="en-US" sz="1800" b="1" i="1" dirty="0">
+                              <a:rPr lang="en-US" sz="1800" b="1" dirty="0">
                                 <a:latin typeface="Cambria Math" panose="02040503050406030204" pitchFamily="18" charset="0"/>
                               </a:rPr>
                             </m:ctrlPr>
@@ -6496,7 +5969,7 @@
                         <m:d>
                           <m:dPr>
                             <m:ctrlPr>
-                              <a:rPr lang="en-US" sz="1800" b="1" i="1" dirty="0">
+                              <a:rPr lang="en-US" sz="1800" i="1" dirty="0">
                                 <a:latin typeface="Cambria Math" panose="02040503050406030204" pitchFamily="18" charset="0"/>
                               </a:rPr>
                             </m:ctrlPr>
@@ -6519,7 +5992,7 @@
                         <m:sSub>
                           <m:sSubPr>
                             <m:ctrlPr>
-                              <a:rPr lang="en-US" sz="1800" b="1" i="1" dirty="0">
+                              <a:rPr lang="en-US" sz="1800" b="1" dirty="0">
                                 <a:latin typeface="Cambria Math" panose="02040503050406030204" pitchFamily="18" charset="0"/>
                               </a:rPr>
                             </m:ctrlPr>
@@ -6544,7 +6017,7 @@
                         <m:d>
                           <m:dPr>
                             <m:ctrlPr>
-                              <a:rPr lang="en-US" sz="1800" b="1" i="1" dirty="0">
+                              <a:rPr lang="en-US" sz="1800" i="1" dirty="0">
                                 <a:latin typeface="Cambria Math" panose="02040503050406030204" pitchFamily="18" charset="0"/>
                               </a:rPr>
                             </m:ctrlPr>
@@ -6563,7 +6036,7 @@
                     <m:d>
                       <m:dPr>
                         <m:ctrlPr>
-                          <a:rPr lang="en-US" sz="1800" b="1" i="1" dirty="0">
+                          <a:rPr lang="en-US" sz="1800" b="1" dirty="0">
                             <a:latin typeface="Cambria Math" panose="02040503050406030204" pitchFamily="18" charset="0"/>
                           </a:rPr>
                         </m:ctrlPr>
@@ -6578,7 +6051,7 @@
                         <m:d>
                           <m:dPr>
                             <m:ctrlPr>
-                              <a:rPr lang="en-US" sz="1800" b="1" i="1" dirty="0">
+                              <a:rPr lang="en-US" sz="1800" i="1" dirty="0">
                                 <a:latin typeface="Cambria Math" panose="02040503050406030204" pitchFamily="18" charset="0"/>
                               </a:rPr>
                             </m:ctrlPr>
@@ -6601,7 +6074,7 @@
                         <m:sSub>
                           <m:sSubPr>
                             <m:ctrlPr>
-                              <a:rPr lang="en-US" sz="1800" b="1" i="1" dirty="0">
+                              <a:rPr lang="en-US" sz="1800" b="1" dirty="0">
                                 <a:latin typeface="Cambria Math" panose="02040503050406030204" pitchFamily="18" charset="0"/>
                               </a:rPr>
                             </m:ctrlPr>
@@ -6626,7 +6099,7 @@
                         <m:d>
                           <m:dPr>
                             <m:ctrlPr>
-                              <a:rPr lang="en-US" sz="1800" b="1" i="1" dirty="0">
+                              <a:rPr lang="en-US" sz="1800" i="1" dirty="0">
                                 <a:latin typeface="Cambria Math" panose="02040503050406030204" pitchFamily="18" charset="0"/>
                               </a:rPr>
                             </m:ctrlPr>
@@ -6654,6 +6127,7 @@
                         <m:ctrlPr>
                           <a:rPr lang="en-US" sz="1800" i="1" dirty="0">
                             <a:latin typeface="Cambria Math" panose="02040503050406030204" pitchFamily="18" charset="0"/>
+                            <a:ea typeface="Cambria Math" panose="02040503050406030204" pitchFamily="18" charset="0"/>
                           </a:rPr>
                         </m:ctrlPr>
                       </m:fPr>
@@ -6692,7 +6166,7 @@
                     <m:d>
                       <m:dPr>
                         <m:ctrlPr>
-                          <a:rPr lang="en-US" sz="1800" i="1" dirty="0">
+                          <a:rPr lang="en-US" sz="1800" b="1" i="1" dirty="0">
                             <a:latin typeface="Cambria Math" panose="02040503050406030204" pitchFamily="18" charset="0"/>
                           </a:rPr>
                         </m:ctrlPr>
@@ -6701,7 +6175,7 @@
                         <m:sSub>
                           <m:sSubPr>
                             <m:ctrlPr>
-                              <a:rPr lang="en-US" sz="1800" b="1" i="1" dirty="0">
+                              <a:rPr lang="en-US" sz="1800" b="1" dirty="0">
                                 <a:latin typeface="Cambria Math" panose="02040503050406030204" pitchFamily="18" charset="0"/>
                               </a:rPr>
                             </m:ctrlPr>
@@ -6726,7 +6200,7 @@
                         <m:d>
                           <m:dPr>
                             <m:ctrlPr>
-                              <a:rPr lang="en-US" sz="1800" b="1" i="1" dirty="0">
+                              <a:rPr lang="en-US" sz="1800" i="1" dirty="0">
                                 <a:latin typeface="Cambria Math" panose="02040503050406030204" pitchFamily="18" charset="0"/>
                               </a:rPr>
                             </m:ctrlPr>
@@ -6749,7 +6223,7 @@
                         <m:sSub>
                           <m:sSubPr>
                             <m:ctrlPr>
-                              <a:rPr lang="en-US" sz="1800" b="1" i="1" dirty="0">
+                              <a:rPr lang="en-US" sz="1800" b="1" dirty="0">
                                 <a:latin typeface="Cambria Math" panose="02040503050406030204" pitchFamily="18" charset="0"/>
                               </a:rPr>
                             </m:ctrlPr>
@@ -6774,7 +6248,7 @@
                         <m:d>
                           <m:dPr>
                             <m:ctrlPr>
-                              <a:rPr lang="en-US" sz="1800" b="1" i="1" dirty="0">
+                              <a:rPr lang="en-US" sz="1800" i="1" dirty="0">
                                 <a:latin typeface="Cambria Math" panose="02040503050406030204" pitchFamily="18" charset="0"/>
                               </a:rPr>
                             </m:ctrlPr>
@@ -6793,7 +6267,7 @@
                     <m:d>
                       <m:dPr>
                         <m:ctrlPr>
-                          <a:rPr lang="en-US" sz="1800" b="1" i="1" dirty="0">
+                          <a:rPr lang="en-US" sz="1800" b="1" dirty="0">
                             <a:latin typeface="Cambria Math" panose="02040503050406030204" pitchFamily="18" charset="0"/>
                           </a:rPr>
                         </m:ctrlPr>
@@ -6808,7 +6282,7 @@
                         <m:d>
                           <m:dPr>
                             <m:ctrlPr>
-                              <a:rPr lang="en-US" sz="1800" b="1" i="1" dirty="0">
+                              <a:rPr lang="en-US" sz="1800" i="1" dirty="0">
                                 <a:latin typeface="Cambria Math" panose="02040503050406030204" pitchFamily="18" charset="0"/>
                               </a:rPr>
                             </m:ctrlPr>
@@ -6831,7 +6305,7 @@
                         <m:sSub>
                           <m:sSubPr>
                             <m:ctrlPr>
-                              <a:rPr lang="en-US" sz="1800" b="1" i="1" dirty="0">
+                              <a:rPr lang="en-US" sz="1800" b="1" dirty="0">
                                 <a:latin typeface="Cambria Math" panose="02040503050406030204" pitchFamily="18" charset="0"/>
                               </a:rPr>
                             </m:ctrlPr>
@@ -6856,7 +6330,7 @@
                         <m:d>
                           <m:dPr>
                             <m:ctrlPr>
-                              <a:rPr lang="en-US" sz="1800" b="1" i="1" dirty="0">
+                              <a:rPr lang="en-US" sz="1800" i="1" dirty="0">
                                 <a:latin typeface="Cambria Math" panose="02040503050406030204" pitchFamily="18" charset="0"/>
                               </a:rPr>
                             </m:ctrlPr>
@@ -6887,7 +6361,7 @@
                     <m:sSub>
                       <m:sSubPr>
                         <m:ctrlPr>
-                          <a:rPr lang="en-US" sz="1800" b="0" i="1" dirty="0" smtClean="0">
+                          <a:rPr lang="en-US" sz="1800" b="1" i="1" dirty="0" smtClean="0">
                             <a:latin typeface="Cambria Math" panose="02040503050406030204" pitchFamily="18" charset="0"/>
                           </a:rPr>
                         </m:ctrlPr>
@@ -6897,7 +6371,7 @@
                           <m:accPr>
                             <m:chr m:val="̇"/>
                             <m:ctrlPr>
-                              <a:rPr lang="en-US" sz="1800" b="1" i="1" dirty="0" smtClean="0">
+                              <a:rPr lang="en-US" sz="1800" b="1" i="0" dirty="0" smtClean="0">
                                 <a:latin typeface="Cambria Math" panose="02040503050406030204" pitchFamily="18" charset="0"/>
                               </a:rPr>
                             </m:ctrlPr>
@@ -6913,7 +6387,7 @@
                               <m:accPr>
                                 <m:chr m:val="̇"/>
                                 <m:ctrlPr>
-                                  <a:rPr lang="en-US" sz="1800" b="1" i="1" dirty="0" smtClean="0">
+                                  <a:rPr lang="en-US" sz="1800" b="1" dirty="0">
                                     <a:latin typeface="Cambria Math" panose="02040503050406030204" pitchFamily="18" charset="0"/>
                                   </a:rPr>
                                 </m:ctrlPr>
@@ -6989,7 +6463,7 @@
                     <m:d>
                       <m:dPr>
                         <m:ctrlPr>
-                          <a:rPr lang="en-US" sz="1800" b="1" i="1" dirty="0">
+                          <a:rPr lang="en-US" sz="1800" b="1" dirty="0">
                             <a:latin typeface="Cambria Math" panose="02040503050406030204" pitchFamily="18" charset="0"/>
                           </a:rPr>
                         </m:ctrlPr>
@@ -7004,7 +6478,7 @@
                         <m:d>
                           <m:dPr>
                             <m:ctrlPr>
-                              <a:rPr lang="en-US" sz="1800" b="1" i="1" dirty="0">
+                              <a:rPr lang="en-US" sz="1800" i="1" dirty="0">
                                 <a:latin typeface="Cambria Math" panose="02040503050406030204" pitchFamily="18" charset="0"/>
                               </a:rPr>
                             </m:ctrlPr>
@@ -7027,7 +6501,7 @@
                         <m:sSub>
                           <m:sSubPr>
                             <m:ctrlPr>
-                              <a:rPr lang="en-US" sz="1800" b="1" i="1" dirty="0">
+                              <a:rPr lang="en-US" sz="1800" b="1" dirty="0">
                                 <a:latin typeface="Cambria Math" panose="02040503050406030204" pitchFamily="18" charset="0"/>
                               </a:rPr>
                             </m:ctrlPr>
@@ -7052,7 +6526,7 @@
                         <m:d>
                           <m:dPr>
                             <m:ctrlPr>
-                              <a:rPr lang="en-US" sz="1800" b="1" i="1" dirty="0">
+                              <a:rPr lang="en-US" sz="1800" i="1" dirty="0">
                                 <a:latin typeface="Cambria Math" panose="02040503050406030204" pitchFamily="18" charset="0"/>
                               </a:rPr>
                             </m:ctrlPr>
@@ -7112,7 +6586,7 @@
                     <m:d>
                       <m:dPr>
                         <m:ctrlPr>
-                          <a:rPr lang="en-US" sz="1800" b="1" i="1" dirty="0">
+                          <a:rPr lang="en-US" sz="1800" b="1" dirty="0">
                             <a:latin typeface="Cambria Math" panose="02040503050406030204" pitchFamily="18" charset="0"/>
                           </a:rPr>
                         </m:ctrlPr>
@@ -7127,7 +6601,7 @@
                         <m:d>
                           <m:dPr>
                             <m:ctrlPr>
-                              <a:rPr lang="en-US" sz="1800" b="1" i="1" dirty="0">
+                              <a:rPr lang="en-US" sz="1800" i="1" dirty="0">
                                 <a:latin typeface="Cambria Math" panose="02040503050406030204" pitchFamily="18" charset="0"/>
                               </a:rPr>
                             </m:ctrlPr>
@@ -7150,7 +6624,7 @@
                         <m:sSub>
                           <m:sSubPr>
                             <m:ctrlPr>
-                              <a:rPr lang="en-US" sz="1800" b="1" i="1" dirty="0">
+                              <a:rPr lang="en-US" sz="1800" b="1" dirty="0">
                                 <a:latin typeface="Cambria Math" panose="02040503050406030204" pitchFamily="18" charset="0"/>
                               </a:rPr>
                             </m:ctrlPr>
@@ -7175,7 +6649,7 @@
                         <m:d>
                           <m:dPr>
                             <m:ctrlPr>
-                              <a:rPr lang="en-US" sz="1800" b="1" i="1" dirty="0">
+                              <a:rPr lang="en-US" sz="1800" i="1" dirty="0">
                                 <a:latin typeface="Cambria Math" panose="02040503050406030204" pitchFamily="18" charset="0"/>
                               </a:rPr>
                             </m:ctrlPr>
@@ -7213,7 +6687,7 @@
                     <m:oMathParaPr>
                       <m:jc m:val="center"/>
                     </m:oMathParaPr>
-                    <m:oMath xmlns:m="http://schemas.openxmlformats.org/officeDocument/2006/math">
+                    <m:oMath>
                       <m:r>
                         <a:rPr lang="en-US" b="0" i="1" smtClean="0">
                           <a:latin typeface="Cambria Math" panose="02040503050406030204" pitchFamily="18" charset="0"/>
@@ -7224,8 +6698,8 @@
                         <m:accPr>
                           <m:chr m:val="̇"/>
                           <m:ctrlPr>
-                            <a:rPr lang="en-US" b="1" i="1" smtClean="0">
-                              <a:latin typeface="Cambria Math" panose="02040503050406030204" pitchFamily="18" charset="0"/>
+                            <a:rPr lang="en-US" b="1">
+                              <a:latin typeface="Cambria Math" charset="0"/>
                             </a:rPr>
                           </m:ctrlPr>
                         </m:accPr>
@@ -7241,7 +6715,7 @@
                       <m:d>
                         <m:dPr>
                           <m:ctrlPr>
-                            <a:rPr lang="en-US" b="1" i="1" smtClean="0">
+                            <a:rPr lang="en-US" b="0" i="1" smtClean="0">
                               <a:latin typeface="Cambria Math" panose="02040503050406030204" pitchFamily="18" charset="0"/>
                             </a:rPr>
                           </m:ctrlPr>
@@ -7309,7 +6783,7 @@
                       <m:d>
                         <m:dPr>
                           <m:ctrlPr>
-                            <a:rPr lang="en-US" b="1" i="1" dirty="0" smtClean="0">
+                            <a:rPr lang="en-US" b="0" i="1" dirty="0" smtClean="0">
                               <a:latin typeface="Cambria Math" panose="02040503050406030204" pitchFamily="18" charset="0"/>
                             </a:rPr>
                           </m:ctrlPr>
@@ -7426,7 +6900,7 @@
                     <m:sSub>
                       <m:sSubPr>
                         <m:ctrlPr>
-                          <a:rPr lang="en-US" b="1" i="1" dirty="0" smtClean="0">
+                          <a:rPr lang="en-US" b="1" i="0" dirty="0" smtClean="0">
                             <a:latin typeface="Cambria Math" panose="02040503050406030204" pitchFamily="18" charset="0"/>
                           </a:rPr>
                         </m:ctrlPr>
@@ -7457,7 +6931,7 @@
                     <m:sSub>
                       <m:sSubPr>
                         <m:ctrlPr>
-                          <a:rPr lang="en-US" i="1" dirty="0" smtClean="0">
+                          <a:rPr lang="en-US" b="0" i="1" dirty="0" smtClean="0">
                             <a:latin typeface="Cambria Math" panose="02040503050406030204" pitchFamily="18" charset="0"/>
                           </a:rPr>
                         </m:ctrlPr>
@@ -7496,7 +6970,7 @@
                     <m:sSub>
                       <m:sSubPr>
                         <m:ctrlPr>
-                          <a:rPr lang="en-US" b="1" i="1" dirty="0" smtClean="0">
+                          <a:rPr lang="en-US" b="1" i="0" dirty="0" smtClean="0">
                             <a:latin typeface="Cambria Math" panose="02040503050406030204" pitchFamily="18" charset="0"/>
                           </a:rPr>
                         </m:ctrlPr>
@@ -7535,7 +7009,7 @@
                     <m:d>
                       <m:dPr>
                         <m:ctrlPr>
-                          <a:rPr lang="en-US" b="1" i="1" dirty="0">
+                          <a:rPr lang="en-US" i="1" dirty="0">
                             <a:latin typeface="Cambria Math" panose="02040503050406030204" pitchFamily="18" charset="0"/>
                           </a:rPr>
                         </m:ctrlPr>
@@ -7566,7 +7040,7 @@
                     <m:sSub>
                       <m:sSubPr>
                         <m:ctrlPr>
-                          <a:rPr lang="en-US" b="1" i="1" dirty="0">
+                          <a:rPr lang="en-US" b="1" dirty="0">
                             <a:latin typeface="Cambria Math" panose="02040503050406030204" pitchFamily="18" charset="0"/>
                           </a:rPr>
                         </m:ctrlPr>
@@ -7591,7 +7065,7 @@
                     <m:d>
                       <m:dPr>
                         <m:ctrlPr>
-                          <a:rPr lang="en-US" b="1" i="1" dirty="0" smtClean="0">
+                          <a:rPr lang="en-US" i="1" dirty="0">
                             <a:latin typeface="Cambria Math" panose="02040503050406030204" pitchFamily="18" charset="0"/>
                           </a:rPr>
                         </m:ctrlPr>
@@ -7634,7 +7108,7 @@
                     <m:d>
                       <m:dPr>
                         <m:ctrlPr>
-                          <a:rPr lang="en-US" b="1" i="1" dirty="0">
+                          <a:rPr lang="en-US" i="1" dirty="0">
                             <a:latin typeface="Cambria Math" panose="02040503050406030204" pitchFamily="18" charset="0"/>
                           </a:rPr>
                         </m:ctrlPr>
@@ -7772,7 +7246,7 @@
           <a:p>
             <a:fld id="{1D18D135-8F2D-8E49-81FD-799032AF3989}" type="datetime1">
               <a:rPr lang="en-US" smtClean="0"/>
-              <a:t>12/20/2025</a:t>
+              <a:t>8/13/26</a:t>
             </a:fld>
             <a:endParaRPr lang="en-US"/>
           </a:p>
@@ -7931,7 +7405,7 @@
                     <m:sSub>
                       <m:sSubPr>
                         <m:ctrlPr>
-                          <a:rPr lang="en-US" b="1" i="1" smtClean="0">
+                          <a:rPr lang="en-US" b="1" i="0" smtClean="0">
                             <a:latin typeface="Cambria Math" panose="02040503050406030204" pitchFamily="18" charset="0"/>
                           </a:rPr>
                         </m:ctrlPr>
@@ -7955,13 +7429,7 @@
                           <a:rPr lang="en-US" b="0" i="1" smtClean="0">
                             <a:latin typeface="Cambria Math" panose="02040503050406030204" pitchFamily="18" charset="0"/>
                           </a:rPr>
-                          <m:t>+</m:t>
-                        </m:r>
-                        <m:r>
-                          <a:rPr lang="en-US" b="0" i="1" smtClean="0">
-                            <a:latin typeface="Cambria Math" panose="02040503050406030204" pitchFamily="18" charset="0"/>
-                          </a:rPr>
-                          <m:t>1</m:t>
+                          <m:t>+1</m:t>
                         </m:r>
                       </m:sub>
                     </m:sSub>
@@ -7989,7 +7457,7 @@
                         <m:sSub>
                           <m:sSubPr>
                             <m:ctrlPr>
-                              <a:rPr lang="en-US" b="1" i="1" dirty="0" smtClean="0">
+                              <a:rPr lang="en-US" b="1" i="0" dirty="0" smtClean="0">
                                 <a:latin typeface="Cambria Math" panose="02040503050406030204" pitchFamily="18" charset="0"/>
                               </a:rPr>
                             </m:ctrlPr>
@@ -8020,7 +7488,7 @@
                         <m:sSub>
                           <m:sSubPr>
                             <m:ctrlPr>
-                              <a:rPr lang="en-US" b="1" i="1" dirty="0" smtClean="0">
+                              <a:rPr lang="en-US" b="1" i="0" dirty="0" smtClean="0">
                                 <a:latin typeface="Cambria Math" panose="02040503050406030204" pitchFamily="18" charset="0"/>
                               </a:rPr>
                             </m:ctrlPr>
@@ -8058,7 +7526,7 @@
                     <m:sSub>
                       <m:sSubPr>
                         <m:ctrlPr>
-                          <a:rPr lang="en-US" b="1" i="1" dirty="0" smtClean="0">
+                          <a:rPr lang="en-US" b="1" dirty="0">
                             <a:latin typeface="Cambria Math" panose="02040503050406030204" pitchFamily="18" charset="0"/>
                           </a:rPr>
                         </m:ctrlPr>
@@ -8097,7 +7565,7 @@
                     <m:sSubSup>
                       <m:sSubSupPr>
                         <m:ctrlPr>
-                          <a:rPr lang="en-US" b="1" i="1" dirty="0" smtClean="0">
+                          <a:rPr lang="en-US" b="1" dirty="0">
                             <a:latin typeface="Cambria Math" panose="02040503050406030204" pitchFamily="18" charset="0"/>
                           </a:rPr>
                         </m:ctrlPr>
@@ -8150,7 +7618,7 @@
                     <m:sSub>
                       <m:sSubPr>
                         <m:ctrlPr>
-                          <a:rPr lang="en-US" b="1" i="1" dirty="0" smtClean="0">
+                          <a:rPr lang="en-US" b="1" dirty="0">
                             <a:latin typeface="Cambria Math" panose="02040503050406030204" pitchFamily="18" charset="0"/>
                           </a:rPr>
                         </m:ctrlPr>
@@ -8189,7 +7657,7 @@
                     <m:sSub>
                       <m:sSubPr>
                         <m:ctrlPr>
-                          <a:rPr lang="en-US" b="1" i="1" dirty="0">
+                          <a:rPr lang="en-US" b="1" dirty="0">
                             <a:latin typeface="Cambria Math" panose="02040503050406030204" pitchFamily="18" charset="0"/>
                           </a:rPr>
                         </m:ctrlPr>
@@ -8259,7 +7727,7 @@
                     <m:sSub>
                       <m:sSubPr>
                         <m:ctrlPr>
-                          <a:rPr lang="en-US" b="1" i="1" dirty="0">
+                          <a:rPr lang="en-US" b="1" i="0" dirty="0" smtClean="0">
                             <a:latin typeface="Cambria Math" panose="02040503050406030204" pitchFamily="18" charset="0"/>
                           </a:rPr>
                         </m:ctrlPr>
@@ -8410,13 +7878,7 @@
                                   <a:rPr lang="en-US" i="1" dirty="0">
                                     <a:latin typeface="Cambria Math" panose="02040503050406030204" pitchFamily="18" charset="0"/>
                                   </a:rPr>
-                                  <m:t>+</m:t>
-                                </m:r>
-                                <m:r>
-                                  <a:rPr lang="en-US" i="1" dirty="0">
-                                    <a:latin typeface="Cambria Math" panose="02040503050406030204" pitchFamily="18" charset="0"/>
-                                  </a:rPr>
-                                  <m:t>1</m:t>
+                                  <m:t>+1</m:t>
                                 </m:r>
                               </m:sub>
                             </m:sSub>
@@ -8453,13 +7915,7 @@
                           <a:rPr lang="en-US" i="1" dirty="0">
                             <a:latin typeface="Cambria Math" panose="02040503050406030204" pitchFamily="18" charset="0"/>
                           </a:rPr>
-                          <m:t>−</m:t>
-                        </m:r>
-                        <m:r>
-                          <a:rPr lang="en-US" i="1" dirty="0">
-                            <a:latin typeface="Cambria Math" panose="02040503050406030204" pitchFamily="18" charset="0"/>
-                          </a:rPr>
-                          <m:t>1</m:t>
+                          <m:t>−1</m:t>
                         </m:r>
                       </m:sup>
                     </m:sSup>
@@ -8523,13 +7979,7 @@
                           <a:rPr lang="en-US" i="1" dirty="0">
                             <a:latin typeface="Cambria Math" panose="02040503050406030204" pitchFamily="18" charset="0"/>
                           </a:rPr>
-                          <m:t>+</m:t>
-                        </m:r>
-                        <m:r>
-                          <a:rPr lang="en-US" i="1" dirty="0">
-                            <a:latin typeface="Cambria Math" panose="02040503050406030204" pitchFamily="18" charset="0"/>
-                          </a:rPr>
-                          <m:t>1</m:t>
+                          <m:t>+1</m:t>
                         </m:r>
                       </m:sub>
                     </m:sSub>
@@ -8627,7 +8077,7 @@
                     <m:sSub>
                       <m:sSubPr>
                         <m:ctrlPr>
-                          <a:rPr lang="en-US" i="1" dirty="0" smtClean="0">
+                          <a:rPr lang="en-US" i="1" dirty="0">
                             <a:latin typeface="Cambria Math" panose="02040503050406030204" pitchFamily="18" charset="0"/>
                           </a:rPr>
                         </m:ctrlPr>
@@ -8660,7 +8110,7 @@
                     <m:sSubSup>
                       <m:sSubSupPr>
                         <m:ctrlPr>
-                          <a:rPr lang="en-US" i="1" dirty="0">
+                          <a:rPr lang="en-US" b="0" i="1" dirty="0" smtClean="0">
                             <a:latin typeface="Cambria Math" panose="02040503050406030204" pitchFamily="18" charset="0"/>
                           </a:rPr>
                         </m:ctrlPr>
@@ -8717,20 +8167,14 @@
                           <a:rPr lang="en-US" i="1" dirty="0">
                             <a:latin typeface="Cambria Math" panose="02040503050406030204" pitchFamily="18" charset="0"/>
                           </a:rPr>
-                          <m:t>+</m:t>
-                        </m:r>
-                        <m:r>
-                          <a:rPr lang="en-US" i="1" dirty="0">
-                            <a:latin typeface="Cambria Math" panose="02040503050406030204" pitchFamily="18" charset="0"/>
-                          </a:rPr>
-                          <m:t>1</m:t>
+                          <m:t>+1</m:t>
                         </m:r>
                       </m:sub>
                     </m:sSub>
                     <m:sSub>
                       <m:sSubPr>
                         <m:ctrlPr>
-                          <a:rPr lang="en-US" i="1" dirty="0">
+                          <a:rPr lang="en-US" b="0" i="1" dirty="0" smtClean="0">
                             <a:latin typeface="Cambria Math" panose="02040503050406030204" pitchFamily="18" charset="0"/>
                           </a:rPr>
                         </m:ctrlPr>
@@ -8818,20 +8262,14 @@
                           <a:rPr lang="en-US" i="1" dirty="0">
                             <a:latin typeface="Cambria Math" panose="02040503050406030204" pitchFamily="18" charset="0"/>
                           </a:rPr>
-                          <m:t>+</m:t>
-                        </m:r>
-                        <m:r>
-                          <a:rPr lang="en-US" i="1" dirty="0">
-                            <a:latin typeface="Cambria Math" panose="02040503050406030204" pitchFamily="18" charset="0"/>
-                          </a:rPr>
-                          <m:t>1</m:t>
+                          <m:t>+1</m:t>
                         </m:r>
                       </m:sub>
                     </m:sSub>
                     <m:sSub>
                       <m:sSubPr>
                         <m:ctrlPr>
-                          <a:rPr lang="en-US" i="1" dirty="0">
+                          <a:rPr lang="en-US" b="0" i="1" dirty="0" smtClean="0">
                             <a:latin typeface="Cambria Math" panose="02040503050406030204" pitchFamily="18" charset="0"/>
                           </a:rPr>
                         </m:ctrlPr>
@@ -8886,7 +8324,7 @@
                             <m:sSubSup>
                               <m:sSubSupPr>
                                 <m:ctrlPr>
-                                  <a:rPr lang="en-US" i="1" dirty="0">
+                                  <a:rPr lang="en-US" b="0" i="1" dirty="0" smtClean="0">
                                     <a:latin typeface="Cambria Math" panose="02040503050406030204" pitchFamily="18" charset="0"/>
                                   </a:rPr>
                                 </m:ctrlPr>
@@ -8943,20 +8381,14 @@
                                   <a:rPr lang="en-US" i="1" dirty="0">
                                     <a:latin typeface="Cambria Math" panose="02040503050406030204" pitchFamily="18" charset="0"/>
                                   </a:rPr>
-                                  <m:t>+</m:t>
-                                </m:r>
-                                <m:r>
-                                  <a:rPr lang="en-US" i="1" dirty="0">
-                                    <a:latin typeface="Cambria Math" panose="02040503050406030204" pitchFamily="18" charset="0"/>
-                                  </a:rPr>
-                                  <m:t>1</m:t>
+                                  <m:t>+1</m:t>
                                 </m:r>
                               </m:sub>
                             </m:sSub>
                             <m:sSub>
                               <m:sSubPr>
                                 <m:ctrlPr>
-                                  <a:rPr lang="en-US" i="1" dirty="0">
+                                  <a:rPr lang="en-US" b="0" i="1" dirty="0" smtClean="0">
                                     <a:latin typeface="Cambria Math" panose="02040503050406030204" pitchFamily="18" charset="0"/>
                                   </a:rPr>
                                 </m:ctrlPr>
@@ -8986,20 +8418,14 @@
                           <a:rPr lang="en-US" b="0" i="1" dirty="0" smtClean="0">
                             <a:latin typeface="Cambria Math" panose="02040503050406030204" pitchFamily="18" charset="0"/>
                           </a:rPr>
-                          <m:t>−</m:t>
-                        </m:r>
-                        <m:r>
-                          <a:rPr lang="en-US" b="0" i="1" dirty="0" smtClean="0">
-                            <a:latin typeface="Cambria Math" panose="02040503050406030204" pitchFamily="18" charset="0"/>
-                          </a:rPr>
-                          <m:t>1</m:t>
+                          <m:t>−1</m:t>
                         </m:r>
                       </m:sup>
                     </m:sSup>
                     <m:sSubSup>
                       <m:sSubSupPr>
                         <m:ctrlPr>
-                          <a:rPr lang="en-US" i="1" dirty="0">
+                          <a:rPr lang="en-US" b="0" i="1" dirty="0" smtClean="0">
                             <a:latin typeface="Cambria Math" panose="02040503050406030204" pitchFamily="18" charset="0"/>
                           </a:rPr>
                         </m:ctrlPr>
@@ -9056,20 +8482,14 @@
                           <a:rPr lang="en-US" i="1" dirty="0">
                             <a:latin typeface="Cambria Math" panose="02040503050406030204" pitchFamily="18" charset="0"/>
                           </a:rPr>
-                          <m:t>+</m:t>
-                        </m:r>
-                        <m:r>
-                          <a:rPr lang="en-US" i="1" dirty="0">
-                            <a:latin typeface="Cambria Math" panose="02040503050406030204" pitchFamily="18" charset="0"/>
-                          </a:rPr>
-                          <m:t>1</m:t>
+                          <m:t>+1</m:t>
                         </m:r>
                       </m:sub>
                     </m:sSub>
                     <m:sSub>
                       <m:sSubPr>
                         <m:ctrlPr>
-                          <a:rPr lang="en-US" i="1" dirty="0">
+                          <a:rPr lang="en-US" b="0" i="1" dirty="0" smtClean="0">
                             <a:latin typeface="Cambria Math" panose="02040503050406030204" pitchFamily="18" charset="0"/>
                           </a:rPr>
                         </m:ctrlPr>
@@ -9114,7 +8534,7 @@
                     <m:sSub>
                       <m:sSubPr>
                         <m:ctrlPr>
-                          <a:rPr lang="en-US" i="1" dirty="0">
+                          <a:rPr lang="en-US" b="0" i="1" dirty="0" smtClean="0">
                             <a:latin typeface="Cambria Math" panose="02040503050406030204" pitchFamily="18" charset="0"/>
                           </a:rPr>
                         </m:ctrlPr>
@@ -9165,7 +8585,7 @@
                     <m:sSub>
                       <m:sSubPr>
                         <m:ctrlPr>
-                          <a:rPr lang="en-US" i="1" dirty="0" smtClean="0">
+                          <a:rPr lang="en-US" b="0" i="1" dirty="0" smtClean="0">
                             <a:latin typeface="Cambria Math" panose="02040503050406030204" pitchFamily="18" charset="0"/>
                           </a:rPr>
                         </m:ctrlPr>
@@ -9200,6 +8620,7 @@
                         <m:ctrlPr>
                           <a:rPr lang="en-US" i="1" dirty="0">
                             <a:latin typeface="Cambria Math" panose="02040503050406030204" pitchFamily="18" charset="0"/>
+                            <a:ea typeface="Cambria Math" panose="02040503050406030204" pitchFamily="18" charset="0"/>
                           </a:rPr>
                         </m:ctrlPr>
                       </m:fPr>
@@ -9237,7 +8658,7 @@
                     <m:d>
                       <m:dPr>
                         <m:ctrlPr>
-                          <a:rPr lang="en-US" i="1" dirty="0">
+                          <a:rPr lang="en-US" b="1" i="1" dirty="0" smtClean="0">
                             <a:latin typeface="Cambria Math" panose="02040503050406030204" pitchFamily="18" charset="0"/>
                           </a:rPr>
                         </m:ctrlPr>
@@ -9246,7 +8667,7 @@
                         <m:sSubSup>
                           <m:sSubSupPr>
                             <m:ctrlPr>
-                              <a:rPr lang="en-US" b="1" i="1" dirty="0" smtClean="0">
+                              <a:rPr lang="en-US" b="1" dirty="0">
                                 <a:latin typeface="Cambria Math" panose="02040503050406030204" pitchFamily="18" charset="0"/>
                               </a:rPr>
                             </m:ctrlPr>
@@ -9285,7 +8706,7 @@
                         <m:sSubSup>
                           <m:sSubSupPr>
                             <m:ctrlPr>
-                              <a:rPr lang="en-US" b="1" i="1" dirty="0">
+                              <a:rPr lang="en-US" b="1" i="0" dirty="0" smtClean="0">
                                 <a:latin typeface="Cambria Math" panose="02040503050406030204" pitchFamily="18" charset="0"/>
                               </a:rPr>
                             </m:ctrlPr>
@@ -9328,7 +8749,7 @@
                     <m:sSub>
                       <m:sSubPr>
                         <m:ctrlPr>
-                          <a:rPr lang="en-US" i="1" dirty="0">
+                          <a:rPr lang="en-US" b="0" i="1" dirty="0" smtClean="0">
                             <a:latin typeface="Cambria Math" panose="02040503050406030204" pitchFamily="18" charset="0"/>
                           </a:rPr>
                         </m:ctrlPr>
@@ -9363,6 +8784,7 @@
                         <m:ctrlPr>
                           <a:rPr lang="en-US" i="1" dirty="0">
                             <a:latin typeface="Cambria Math" panose="02040503050406030204" pitchFamily="18" charset="0"/>
+                            <a:ea typeface="Cambria Math" panose="02040503050406030204" pitchFamily="18" charset="0"/>
                           </a:rPr>
                         </m:ctrlPr>
                       </m:fPr>
@@ -9401,7 +8823,7 @@
                     <m:d>
                       <m:dPr>
                         <m:ctrlPr>
-                          <a:rPr lang="en-US" i="1" dirty="0">
+                          <a:rPr lang="en-US" b="1" i="1" dirty="0">
                             <a:latin typeface="Cambria Math" panose="02040503050406030204" pitchFamily="18" charset="0"/>
                           </a:rPr>
                         </m:ctrlPr>
@@ -9410,7 +8832,7 @@
                         <m:sSubSup>
                           <m:sSubSupPr>
                             <m:ctrlPr>
-                              <a:rPr lang="en-US" b="1" i="1" dirty="0">
+                              <a:rPr lang="en-US" b="1" dirty="0">
                                 <a:latin typeface="Cambria Math" panose="02040503050406030204" pitchFamily="18" charset="0"/>
                               </a:rPr>
                             </m:ctrlPr>
@@ -9449,7 +8871,7 @@
                         <m:sSubSup>
                           <m:sSubSupPr>
                             <m:ctrlPr>
-                              <a:rPr lang="en-US" b="1" i="1" dirty="0">
+                              <a:rPr lang="en-US" b="1" dirty="0">
                                 <a:latin typeface="Cambria Math" panose="02040503050406030204" pitchFamily="18" charset="0"/>
                               </a:rPr>
                             </m:ctrlPr>
@@ -9611,7 +9033,7 @@
           <a:p>
             <a:fld id="{D433BA38-76FB-384D-A0F9-957461A6F2AE}" type="datetime1">
               <a:rPr lang="en-US" smtClean="0"/>
-              <a:t>12/20/2025</a:t>
+              <a:t>8/13/26</a:t>
             </a:fld>
             <a:endParaRPr lang="en-US"/>
           </a:p>
@@ -9751,7 +9173,7 @@
           <a:p>
             <a:fld id="{C831E323-CD06-A24D-BFBA-B52C694DE480}" type="datetime1">
               <a:rPr lang="en-US" smtClean="0"/>
-              <a:t>12/20/2025</a:t>
+              <a:t>8/13/26</a:t>
             </a:fld>
             <a:endParaRPr lang="en-US"/>
           </a:p>
@@ -10191,7 +9613,7 @@
           <a:p>
             <a:fld id="{A558A9F6-D5E6-2845-9990-457223861935}" type="datetime1">
               <a:rPr lang="en-US" smtClean="0"/>
-              <a:t>12/20/2025</a:t>
+              <a:t>8/13/26</a:t>
             </a:fld>
             <a:endParaRPr lang="en-US"/>
           </a:p>
@@ -10425,7 +9847,7 @@
           <a:p>
             <a:fld id="{6EA3BD61-343A-9947-967F-E77847F30BC5}" type="datetime1">
               <a:rPr lang="en-US" smtClean="0"/>
-              <a:t>12/20/2025</a:t>
+              <a:t>8/13/26</a:t>
             </a:fld>
             <a:endParaRPr lang="en-US"/>
           </a:p>
@@ -10586,7 +10008,7 @@
                     <m:sSub>
                       <m:sSubPr>
                         <m:ctrlPr>
-                          <a:rPr lang="en-US" b="0" i="1" smtClean="0">
+                          <a:rPr lang="en-US" b="1" i="0" smtClean="0">
                             <a:latin typeface="Cambria Math" panose="02040503050406030204" pitchFamily="18" charset="0"/>
                           </a:rPr>
                         </m:ctrlPr>
@@ -10636,7 +10058,7 @@
                     <m:sSub>
                       <m:sSubPr>
                         <m:ctrlPr>
-                          <a:rPr lang="en-US" i="1">
+                          <a:rPr lang="en-US" b="1" i="0" smtClean="0">
                             <a:latin typeface="Cambria Math" panose="02040503050406030204" pitchFamily="18" charset="0"/>
                           </a:rPr>
                         </m:ctrlPr>
@@ -10802,7 +10224,7 @@
           <a:p>
             <a:fld id="{97375DDB-F02A-0140-89F3-902BDDA6B637}" type="datetime1">
               <a:rPr lang="en-US" smtClean="0"/>
-              <a:t>12/20/2025</a:t>
+              <a:t>8/13/26</a:t>
             </a:fld>
             <a:endParaRPr lang="en-US"/>
           </a:p>
@@ -11154,7 +10576,7 @@
           <a:p>
             <a:fld id="{1C122907-D8E2-5E41-AB3F-20FF1B750E10}" type="datetime1">
               <a:rPr lang="en-US" smtClean="0"/>
-              <a:t>12/20/2025</a:t>
+              <a:t>8/13/26</a:t>
             </a:fld>
             <a:endParaRPr lang="en-US"/>
           </a:p>
@@ -11393,8 +10815,8 @@
                       <m:accPr>
                         <m:chr m:val="̇"/>
                         <m:ctrlPr>
-                          <a:rPr lang="en-US" b="1" i="1" smtClean="0">
-                            <a:latin typeface="Cambria Math" panose="02040503050406030204" pitchFamily="18" charset="0"/>
+                          <a:rPr lang="en-US" b="1">
+                            <a:latin typeface="Cambria Math" charset="0"/>
                           </a:rPr>
                         </m:ctrlPr>
                       </m:accPr>
@@ -11519,7 +10941,7 @@
                     <m:sSup>
                       <m:sSupPr>
                         <m:ctrlPr>
-                          <a:rPr lang="en-US" b="1" i="1" dirty="0" smtClean="0">
+                          <a:rPr lang="en-US" b="1" dirty="0">
                             <a:latin typeface="Cambria Math" panose="02040503050406030204" pitchFamily="18" charset="0"/>
                           </a:rPr>
                         </m:ctrlPr>
@@ -11719,7 +11141,7 @@
           <a:p>
             <a:fld id="{690483A0-3D17-6A49-964B-DB512BCF7566}" type="datetime1">
               <a:rPr lang="en-US" smtClean="0"/>
-              <a:t>12/20/2025</a:t>
+              <a:t>8/13/26</a:t>
             </a:fld>
             <a:endParaRPr lang="en-US"/>
           </a:p>
@@ -12032,7 +11454,7 @@
           <a:p>
             <a:fld id="{69A81195-3509-EA4F-BDBE-4CCC6D79E21F}" type="datetime1">
               <a:rPr lang="en-US" smtClean="0"/>
-              <a:t>12/20/2025</a:t>
+              <a:t>8/13/26</a:t>
             </a:fld>
             <a:endParaRPr lang="en-US"/>
           </a:p>
@@ -12496,7 +11918,7 @@
           <a:p>
             <a:fld id="{47FE71FE-7F63-5849-9B68-136AA2F3CFE1}" type="datetime1">
               <a:rPr lang="en-US" smtClean="0"/>
-              <a:t>12/20/2025</a:t>
+              <a:t>8/13/26</a:t>
             </a:fld>
             <a:endParaRPr lang="en-US"/>
           </a:p>
@@ -12708,7 +12130,7 @@
                       <m:accPr>
                         <m:chr m:val="̇"/>
                         <m:ctrlPr>
-                          <a:rPr lang="en-US" b="1" i="1" dirty="0" smtClean="0">
+                          <a:rPr lang="en-US" b="1" i="0" dirty="0" smtClean="0">
                             <a:latin typeface="Cambria Math" panose="02040503050406030204" pitchFamily="18" charset="0"/>
                           </a:rPr>
                         </m:ctrlPr>
@@ -12731,7 +12153,7 @@
                     <m:sSup>
                       <m:sSupPr>
                         <m:ctrlPr>
-                          <a:rPr lang="en-US" b="1" i="1" dirty="0" smtClean="0">
+                          <a:rPr lang="en-US" b="1" i="0" dirty="0" smtClean="0">
                             <a:latin typeface="Cambria Math" panose="02040503050406030204" pitchFamily="18" charset="0"/>
                           </a:rPr>
                         </m:ctrlPr>
@@ -12786,7 +12208,7 @@
                     <m:sSup>
                       <m:sSupPr>
                         <m:ctrlPr>
-                          <a:rPr lang="en-US" b="1" i="1" smtClean="0">
+                          <a:rPr lang="en-US" b="1" i="0" smtClean="0">
                             <a:latin typeface="Cambria Math" panose="02040503050406030204" pitchFamily="18" charset="0"/>
                           </a:rPr>
                         </m:ctrlPr>
@@ -12816,13 +12238,7 @@
                           <a:rPr lang="en-US" b="0" i="1" smtClean="0">
                             <a:latin typeface="Cambria Math" panose="02040503050406030204" pitchFamily="18" charset="0"/>
                           </a:rPr>
-                          <m:t>+1</m:t>
-                        </m:r>
-                        <m:r>
-                          <a:rPr lang="en-US" b="1" i="0" smtClean="0">
-                            <a:latin typeface="Cambria Math" panose="02040503050406030204" pitchFamily="18" charset="0"/>
-                          </a:rPr>
-                          <m:t>)</m:t>
+                          <m:t>+1)</m:t>
                         </m:r>
                       </m:sup>
                     </m:sSup>
@@ -12864,7 +12280,7 @@
                     <m:sSub>
                       <m:sSubPr>
                         <m:ctrlPr>
-                          <a:rPr lang="en-US" b="1" i="1" smtClean="0">
+                          <a:rPr lang="en-US" b="1">
                             <a:latin typeface="Cambria Math" panose="02040503050406030204" pitchFamily="18" charset="0"/>
                           </a:rPr>
                         </m:ctrlPr>
@@ -13023,7 +12439,7 @@
                     <m:sSubSup>
                       <m:sSubSupPr>
                         <m:ctrlPr>
-                          <a:rPr lang="en-US" b="0" i="1" smtClean="0">
+                          <a:rPr lang="en-US" i="1">
                             <a:latin typeface="Cambria Math" panose="02040503050406030204" pitchFamily="18" charset="0"/>
                           </a:rPr>
                         </m:ctrlPr>
@@ -13074,7 +12490,7 @@
                     <m:sSub>
                       <m:sSubPr>
                         <m:ctrlPr>
-                          <a:rPr lang="en-US" i="1">
+                          <a:rPr lang="en-US" b="0" i="1" smtClean="0">
                             <a:latin typeface="Cambria Math" panose="02040503050406030204" pitchFamily="18" charset="0"/>
                           </a:rPr>
                         </m:ctrlPr>
@@ -13105,7 +12521,7 @@
                     <m:sSub>
                       <m:sSubPr>
                         <m:ctrlPr>
-                          <a:rPr lang="en-US" i="1">
+                          <a:rPr lang="en-US" b="0" i="1" smtClean="0">
                             <a:latin typeface="Cambria Math" panose="02040503050406030204" pitchFamily="18" charset="0"/>
                           </a:rPr>
                         </m:ctrlPr>
@@ -13158,7 +12574,7 @@
                     <m:sSub>
                       <m:sSubPr>
                         <m:ctrlPr>
-                          <a:rPr lang="en-US" i="1">
+                          <a:rPr lang="en-US" b="0" i="1" smtClean="0">
                             <a:latin typeface="Cambria Math" panose="02040503050406030204" pitchFamily="18" charset="0"/>
                           </a:rPr>
                         </m:ctrlPr>
@@ -13233,7 +12649,7 @@
                       <m:naryPr>
                         <m:chr m:val="∑"/>
                         <m:ctrlPr>
-                          <a:rPr lang="en-US" i="1" smtClean="0">
+                          <a:rPr lang="en-US" b="0" i="1" smtClean="0">
                             <a:latin typeface="Cambria Math" panose="02040503050406030204" pitchFamily="18" charset="0"/>
                           </a:rPr>
                         </m:ctrlPr>
@@ -13491,7 +12907,7 @@
           <a:p>
             <a:fld id="{8115CF25-EACA-3543-A18D-2142F0BACAE5}" type="datetime1">
               <a:rPr lang="en-US" smtClean="0"/>
-              <a:t>12/20/2025</a:t>
+              <a:t>8/13/26</a:t>
             </a:fld>
             <a:endParaRPr lang="en-US"/>
           </a:p>
